--- a/AI_推进汇报_2026上半年_v4.pptx
+++ b/AI_推进汇报_2026上半年_v4.pptx
@@ -11,6 +11,11 @@
     <p:sldId id="268" r:id="rId6"/>
     <p:sldId id="269" r:id="rId7"/>
     <p:sldId id="270" r:id="rId8"/>
+    <p:sldId id="271" r:id="rId18"/>
+    <p:sldId id="272" r:id="rId19"/>
+    <p:sldId id="273" r:id="rId20"/>
+    <p:sldId id="274" r:id="rId21"/>
+    <p:sldId id="275" r:id="rId22"/>
     <p:sldId id="258" r:id="rId9"/>
     <p:sldId id="259" r:id="rId10"/>
     <p:sldId id="261" r:id="rId11"/>
@@ -3324,14 +3329,6 @@
           <a:p>
             <a:pPr algn="r"/>
             <a:r>
-              <a:rPr sz="800" b="0">
-                <a:solidFill>
-                  <a:srgbClr val="FFFFFF"/>
-                </a:solidFill>
-                <a:latin typeface="Arial" panose="020B0604020202020204"/>
-                <a:ea typeface="微软雅黑" panose="020B0503020204020204" charset="-122"/>
-                <a:cs typeface="微软雅黑" panose="020B0503020204020204" charset="-122"/>
-              </a:rPr>
               <a:t>1</a:t>
             </a:r>
             <a:endParaRPr sz="800" b="0">
@@ -3565,15 +3562,7 @@
           <a:p>
             <a:pPr algn="r"/>
             <a:r>
-              <a:rPr sz="800" b="0">
-                <a:solidFill>
-                  <a:srgbClr val="7A89A8"/>
-                </a:solidFill>
-                <a:latin typeface="Arial" panose="020B0604020202020204"/>
-                <a:ea typeface="微软雅黑" panose="020B0503020204020204" charset="-122"/>
-                <a:cs typeface="微软雅黑" panose="020B0503020204020204" charset="-122"/>
-              </a:rPr>
-              <a:t>12</a:t>
+              <a:t>15</a:t>
             </a:r>
             <a:endParaRPr sz="800" b="0">
               <a:solidFill>
@@ -4755,15 +4744,7 @@
           <a:p>
             <a:pPr algn="r"/>
             <a:r>
-              <a:rPr sz="800" b="0">
-                <a:solidFill>
-                  <a:srgbClr val="7A89A8"/>
-                </a:solidFill>
-                <a:latin typeface="Arial" panose="020B0604020202020204"/>
-                <a:ea typeface="微软雅黑" panose="020B0503020204020204" charset="-122"/>
-                <a:cs typeface="微软雅黑" panose="020B0503020204020204" charset="-122"/>
-              </a:rPr>
-              <a:t>14</a:t>
+              <a:t>16</a:t>
             </a:r>
             <a:endParaRPr sz="800" b="0">
               <a:solidFill>
@@ -5801,15 +5782,7 @@
           <a:p>
             <a:pPr algn="r"/>
             <a:r>
-              <a:rPr sz="800" b="0">
-                <a:solidFill>
-                  <a:srgbClr val="7A89A8"/>
-                </a:solidFill>
-                <a:latin typeface="Arial" panose="020B0604020202020204"/>
-                <a:ea typeface="微软雅黑" panose="020B0503020204020204" charset="-122"/>
-                <a:cs typeface="微软雅黑" panose="020B0503020204020204" charset="-122"/>
-              </a:rPr>
-              <a:t>15</a:t>
+              <a:t>17</a:t>
             </a:r>
             <a:endParaRPr sz="800" b="0">
               <a:solidFill>
@@ -7448,6 +7421,5908 @@
               <a:ea typeface="微软雅黑" panose="020B0503020204020204" charset="-122"/>
               <a:cs typeface="微软雅黑" panose="020B0503020204020204" charset="-122"/>
             </a:endParaRPr>
+          </a:p>
+        </p:txBody>
+      </p:sp>
+    </p:spTree>
+  </p:cSld>
+  <p:clrMapOvr>
+    <a:masterClrMapping/>
+  </p:clrMapOvr>
+</p:sld>
+</file>
+
+<file path=ppt/slides/slide13.xml><?xml version="1.0" encoding="utf-8"?>
+<p:sld xmlns:a="http://schemas.openxmlformats.org/drawingml/2006/main" xmlns:p="http://schemas.openxmlformats.org/presentationml/2006/main" xmlns:r="http://schemas.openxmlformats.org/officeDocument/2006/relationships">
+  <p:cSld>
+    <p:spTree>
+      <p:nvGrpSpPr>
+        <p:cNvPr id="1" name=""/>
+        <p:cNvGrpSpPr/>
+        <p:nvPr/>
+      </p:nvGrpSpPr>
+      <p:grpSpPr/>
+      <p:sp>
+        <p:nvSpPr>
+          <p:cNvPr id="2" name="TextBox 1"/>
+          <p:cNvSpPr txBox="1"/>
+          <p:nvPr/>
+        </p:nvSpPr>
+        <p:spPr>
+          <a:xfrm>
+            <a:off x="3200400" y="182880"/>
+            <a:ext cx="5760720" cy="457200"/>
+          </a:xfrm>
+          <a:prstGeom prst="rect">
+            <a:avLst/>
+          </a:prstGeom>
+          <a:noFill/>
+        </p:spPr>
+        <p:txBody>
+          <a:bodyPr wrap="none">
+            <a:spAutoFit/>
+          </a:bodyPr>
+          <a:lstStyle/>
+          <a:p>
+            <a:pPr algn="l">
+              <a:spcAft>
+                <a:spcPts val="400"/>
+              </a:spcAft>
+              <a:defRPr sz="2000" b="1">
+                <a:solidFill>
+                  <a:srgbClr val="00366A"/>
+                </a:solidFill>
+                <a:latin typeface="Microsoft YaHei"/>
+              </a:defRPr>
+            </a:pPr>
+            <a:r>
+              <a:t>B902 产能建设 · 双轨并行总览</a:t>
+            </a:r>
+          </a:p>
+        </p:txBody>
+      </p:sp>
+      <p:sp>
+        <p:nvSpPr>
+          <p:cNvPr id="3" name="Rectangle 2"/>
+          <p:cNvSpPr/>
+          <p:nvPr/>
+        </p:nvSpPr>
+        <p:spPr>
+          <a:xfrm>
+            <a:off x="274320" y="777240"/>
+            <a:ext cx="8595360" cy="27432"/>
+          </a:xfrm>
+          <a:prstGeom prst="rect">
+            <a:avLst/>
+          </a:prstGeom>
+          <a:solidFill>
+            <a:srgbClr val="FF7E3D"/>
+          </a:solidFill>
+          <a:ln>
+            <a:noFill/>
+          </a:ln>
+        </p:spPr>
+        <p:style>
+          <a:lnRef idx="1">
+            <a:schemeClr val="accent1"/>
+          </a:lnRef>
+          <a:fillRef idx="3">
+            <a:schemeClr val="accent1"/>
+          </a:fillRef>
+          <a:effectRef idx="2">
+            <a:schemeClr val="accent1"/>
+          </a:effectRef>
+          <a:fontRef idx="minor">
+            <a:schemeClr val="lt1"/>
+          </a:fontRef>
+        </p:style>
+        <p:txBody>
+          <a:bodyPr rtlCol="0" anchor="ctr"/>
+          <a:lstStyle/>
+          <a:p>
+            <a:pPr algn="ctr"/>
+          </a:p>
+        </p:txBody>
+      </p:sp>
+      <p:sp>
+        <p:nvSpPr>
+          <p:cNvPr id="4" name="TextBox 3"/>
+          <p:cNvSpPr txBox="1"/>
+          <p:nvPr/>
+        </p:nvSpPr>
+        <p:spPr>
+          <a:xfrm>
+            <a:off x="274320" y="914400"/>
+            <a:ext cx="8595360" cy="329184"/>
+          </a:xfrm>
+          <a:prstGeom prst="rect">
+            <a:avLst/>
+          </a:prstGeom>
+          <a:noFill/>
+        </p:spPr>
+        <p:txBody>
+          <a:bodyPr wrap="none">
+            <a:spAutoFit/>
+          </a:bodyPr>
+          <a:lstStyle/>
+          <a:p>
+            <a:pPr algn="l">
+              <a:spcAft>
+                <a:spcPts val="400"/>
+              </a:spcAft>
+              <a:defRPr sz="950" b="0">
+                <a:solidFill>
+                  <a:srgbClr val="2C3E50"/>
+                </a:solidFill>
+                <a:latin typeface="Microsoft YaHei"/>
+              </a:defRPr>
+            </a:pPr>
+            <a:r>
+              <a:t>既有厂房改造（近期能力）+ 东侧扩建（中长期产能）· 我作为国内 PM 支持统筹信息闭环与决策材料</a:t>
+            </a:r>
+          </a:p>
+        </p:txBody>
+      </p:sp>
+      <p:sp>
+        <p:nvSpPr>
+          <p:cNvPr id="5" name="Rounded Rectangle 4"/>
+          <p:cNvSpPr/>
+          <p:nvPr/>
+        </p:nvSpPr>
+        <p:spPr>
+          <a:xfrm>
+            <a:off x="274320" y="1325880"/>
+            <a:ext cx="2103120" cy="1051560"/>
+          </a:xfrm>
+          <a:prstGeom prst="roundRect">
+            <a:avLst/>
+          </a:prstGeom>
+          <a:solidFill>
+            <a:srgbClr val="E7EEFB"/>
+          </a:solidFill>
+          <a:ln>
+            <a:noFill/>
+          </a:ln>
+        </p:spPr>
+        <p:style>
+          <a:lnRef idx="1">
+            <a:schemeClr val="accent1"/>
+          </a:lnRef>
+          <a:fillRef idx="3">
+            <a:schemeClr val="accent1"/>
+          </a:fillRef>
+          <a:effectRef idx="2">
+            <a:schemeClr val="accent1"/>
+          </a:effectRef>
+          <a:fontRef idx="minor">
+            <a:schemeClr val="lt1"/>
+          </a:fontRef>
+        </p:style>
+        <p:txBody>
+          <a:bodyPr rtlCol="0" anchor="ctr"/>
+          <a:lstStyle/>
+          <a:p>
+            <a:pPr algn="ctr"/>
+          </a:p>
+        </p:txBody>
+      </p:sp>
+      <p:sp>
+        <p:nvSpPr>
+          <p:cNvPr id="6" name="TextBox 5"/>
+          <p:cNvSpPr txBox="1"/>
+          <p:nvPr/>
+        </p:nvSpPr>
+        <p:spPr>
+          <a:xfrm>
+            <a:off x="274320" y="1417320"/>
+            <a:ext cx="2103120" cy="502920"/>
+          </a:xfrm>
+          <a:prstGeom prst="rect">
+            <a:avLst/>
+          </a:prstGeom>
+          <a:noFill/>
+        </p:spPr>
+        <p:txBody>
+          <a:bodyPr wrap="none">
+            <a:spAutoFit/>
+          </a:bodyPr>
+          <a:lstStyle/>
+          <a:p>
+            <a:pPr algn="ctr">
+              <a:spcAft>
+                <a:spcPts val="400"/>
+              </a:spcAft>
+              <a:defRPr sz="2200" b="1">
+                <a:solidFill>
+                  <a:srgbClr val="00366A"/>
+                </a:solidFill>
+                <a:latin typeface="Microsoft YaHei"/>
+              </a:defRPr>
+            </a:pPr>
+            <a:r>
+              <a:t>双轨 FS</a:t>
+            </a:r>
+          </a:p>
+        </p:txBody>
+      </p:sp>
+      <p:sp>
+        <p:nvSpPr>
+          <p:cNvPr id="7" name="TextBox 6"/>
+          <p:cNvSpPr txBox="1"/>
+          <p:nvPr/>
+        </p:nvSpPr>
+        <p:spPr>
+          <a:xfrm>
+            <a:off x="274320" y="1965960"/>
+            <a:ext cx="2103120" cy="365760"/>
+          </a:xfrm>
+          <a:prstGeom prst="rect">
+            <a:avLst/>
+          </a:prstGeom>
+          <a:noFill/>
+        </p:spPr>
+        <p:txBody>
+          <a:bodyPr wrap="none">
+            <a:spAutoFit/>
+          </a:bodyPr>
+          <a:lstStyle/>
+          <a:p>
+            <a:pPr algn="ctr">
+              <a:spcAft>
+                <a:spcPts val="400"/>
+              </a:spcAft>
+              <a:defRPr sz="900" b="0">
+                <a:solidFill>
+                  <a:srgbClr val="2C3E50"/>
+                </a:solidFill>
+                <a:latin typeface="Microsoft YaHei"/>
+              </a:defRPr>
+            </a:pPr>
+            <a:r>
+              <a:t>扩建 + 改造 可行性已完成</a:t>
+            </a:r>
+          </a:p>
+        </p:txBody>
+      </p:sp>
+      <p:sp>
+        <p:nvSpPr>
+          <p:cNvPr id="8" name="Rounded Rectangle 7"/>
+          <p:cNvSpPr/>
+          <p:nvPr/>
+        </p:nvSpPr>
+        <p:spPr>
+          <a:xfrm>
+            <a:off x="2468880" y="1325880"/>
+            <a:ext cx="2103120" cy="1051560"/>
+          </a:xfrm>
+          <a:prstGeom prst="roundRect">
+            <a:avLst/>
+          </a:prstGeom>
+          <a:solidFill>
+            <a:srgbClr val="E7EEFB"/>
+          </a:solidFill>
+          <a:ln>
+            <a:noFill/>
+          </a:ln>
+        </p:spPr>
+        <p:style>
+          <a:lnRef idx="1">
+            <a:schemeClr val="accent1"/>
+          </a:lnRef>
+          <a:fillRef idx="3">
+            <a:schemeClr val="accent1"/>
+          </a:fillRef>
+          <a:effectRef idx="2">
+            <a:schemeClr val="accent1"/>
+          </a:effectRef>
+          <a:fontRef idx="minor">
+            <a:schemeClr val="lt1"/>
+          </a:fontRef>
+        </p:style>
+        <p:txBody>
+          <a:bodyPr rtlCol="0" anchor="ctr"/>
+          <a:lstStyle/>
+          <a:p>
+            <a:pPr algn="ctr"/>
+          </a:p>
+        </p:txBody>
+      </p:sp>
+      <p:sp>
+        <p:nvSpPr>
+          <p:cNvPr id="9" name="TextBox 8"/>
+          <p:cNvSpPr txBox="1"/>
+          <p:nvPr/>
+        </p:nvSpPr>
+        <p:spPr>
+          <a:xfrm>
+            <a:off x="2468880" y="1417320"/>
+            <a:ext cx="2103120" cy="502920"/>
+          </a:xfrm>
+          <a:prstGeom prst="rect">
+            <a:avLst/>
+          </a:prstGeom>
+          <a:noFill/>
+        </p:spPr>
+        <p:txBody>
+          <a:bodyPr wrap="none">
+            <a:spAutoFit/>
+          </a:bodyPr>
+          <a:lstStyle/>
+          <a:p>
+            <a:pPr algn="ctr">
+              <a:spcAft>
+                <a:spcPts val="400"/>
+              </a:spcAft>
+              <a:defRPr sz="2200" b="1">
+                <a:solidFill>
+                  <a:srgbClr val="00366A"/>
+                </a:solidFill>
+                <a:latin typeface="Microsoft YaHei"/>
+              </a:defRPr>
+            </a:pPr>
+            <a:r>
+              <a:t>投资测算</a:t>
+            </a:r>
+          </a:p>
+        </p:txBody>
+      </p:sp>
+      <p:sp>
+        <p:nvSpPr>
+          <p:cNvPr id="10" name="TextBox 9"/>
+          <p:cNvSpPr txBox="1"/>
+          <p:nvPr/>
+        </p:nvSpPr>
+        <p:spPr>
+          <a:xfrm>
+            <a:off x="2468880" y="1965960"/>
+            <a:ext cx="2103120" cy="365760"/>
+          </a:xfrm>
+          <a:prstGeom prst="rect">
+            <a:avLst/>
+          </a:prstGeom>
+          <a:noFill/>
+        </p:spPr>
+        <p:txBody>
+          <a:bodyPr wrap="none">
+            <a:spAutoFit/>
+          </a:bodyPr>
+          <a:lstStyle/>
+          <a:p>
+            <a:pPr algn="ctr">
+              <a:spcAft>
+                <a:spcPts val="400"/>
+              </a:spcAft>
+              <a:defRPr sz="900" b="0">
+                <a:solidFill>
+                  <a:srgbClr val="2C3E50"/>
+                </a:solidFill>
+                <a:latin typeface="Microsoft YaHei"/>
+              </a:defRPr>
+            </a:pPr>
+            <a:r>
+              <a:t>OOM 框架已明确</a:t>
+            </a:r>
+          </a:p>
+        </p:txBody>
+      </p:sp>
+      <p:sp>
+        <p:nvSpPr>
+          <p:cNvPr id="11" name="Rounded Rectangle 10"/>
+          <p:cNvSpPr/>
+          <p:nvPr/>
+        </p:nvSpPr>
+        <p:spPr>
+          <a:xfrm>
+            <a:off x="4663440" y="1325880"/>
+            <a:ext cx="2103120" cy="1051560"/>
+          </a:xfrm>
+          <a:prstGeom prst="roundRect">
+            <a:avLst/>
+          </a:prstGeom>
+          <a:solidFill>
+            <a:srgbClr val="E7EEFB"/>
+          </a:solidFill>
+          <a:ln>
+            <a:noFill/>
+          </a:ln>
+        </p:spPr>
+        <p:style>
+          <a:lnRef idx="1">
+            <a:schemeClr val="accent1"/>
+          </a:lnRef>
+          <a:fillRef idx="3">
+            <a:schemeClr val="accent1"/>
+          </a:fillRef>
+          <a:effectRef idx="2">
+            <a:schemeClr val="accent1"/>
+          </a:effectRef>
+          <a:fontRef idx="minor">
+            <a:schemeClr val="lt1"/>
+          </a:fontRef>
+        </p:style>
+        <p:txBody>
+          <a:bodyPr rtlCol="0" anchor="ctr"/>
+          <a:lstStyle/>
+          <a:p>
+            <a:pPr algn="ctr"/>
+          </a:p>
+        </p:txBody>
+      </p:sp>
+      <p:sp>
+        <p:nvSpPr>
+          <p:cNvPr id="12" name="TextBox 11"/>
+          <p:cNvSpPr txBox="1"/>
+          <p:nvPr/>
+        </p:nvSpPr>
+        <p:spPr>
+          <a:xfrm>
+            <a:off x="4663440" y="1417320"/>
+            <a:ext cx="2103120" cy="502920"/>
+          </a:xfrm>
+          <a:prstGeom prst="rect">
+            <a:avLst/>
+          </a:prstGeom>
+          <a:noFill/>
+        </p:spPr>
+        <p:txBody>
+          <a:bodyPr wrap="none">
+            <a:spAutoFit/>
+          </a:bodyPr>
+          <a:lstStyle/>
+          <a:p>
+            <a:pPr algn="ctr">
+              <a:spcAft>
+                <a:spcPts val="400"/>
+              </a:spcAft>
+              <a:defRPr sz="2200" b="1">
+                <a:solidFill>
+                  <a:srgbClr val="00366A"/>
+                </a:solidFill>
+                <a:latin typeface="Microsoft YaHei"/>
+              </a:defRPr>
+            </a:pPr>
+            <a:r>
+              <a:t>多版材料</a:t>
+            </a:r>
+          </a:p>
+        </p:txBody>
+      </p:sp>
+      <p:sp>
+        <p:nvSpPr>
+          <p:cNvPr id="13" name="TextBox 12"/>
+          <p:cNvSpPr txBox="1"/>
+          <p:nvPr/>
+        </p:nvSpPr>
+        <p:spPr>
+          <a:xfrm>
+            <a:off x="4663440" y="1965960"/>
+            <a:ext cx="2103120" cy="365760"/>
+          </a:xfrm>
+          <a:prstGeom prst="rect">
+            <a:avLst/>
+          </a:prstGeom>
+          <a:noFill/>
+        </p:spPr>
+        <p:txBody>
+          <a:bodyPr wrap="none">
+            <a:spAutoFit/>
+          </a:bodyPr>
+          <a:lstStyle/>
+          <a:p>
+            <a:pPr algn="ctr">
+              <a:spcAft>
+                <a:spcPts val="400"/>
+              </a:spcAft>
+              <a:defRPr sz="900" b="0">
+                <a:solidFill>
+                  <a:srgbClr val="2C3E50"/>
+                </a:solidFill>
+                <a:latin typeface="Microsoft YaHei"/>
+              </a:defRPr>
+            </a:pPr>
+            <a:r>
+              <a:t>组合汇报支撑决策</a:t>
+            </a:r>
+          </a:p>
+        </p:txBody>
+      </p:sp>
+      <p:sp>
+        <p:nvSpPr>
+          <p:cNvPr id="14" name="Rounded Rectangle 13"/>
+          <p:cNvSpPr/>
+          <p:nvPr/>
+        </p:nvSpPr>
+        <p:spPr>
+          <a:xfrm>
+            <a:off x="6858000" y="1325880"/>
+            <a:ext cx="2103120" cy="1051560"/>
+          </a:xfrm>
+          <a:prstGeom prst="roundRect">
+            <a:avLst/>
+          </a:prstGeom>
+          <a:solidFill>
+            <a:srgbClr val="E7EEFB"/>
+          </a:solidFill>
+          <a:ln>
+            <a:noFill/>
+          </a:ln>
+        </p:spPr>
+        <p:style>
+          <a:lnRef idx="1">
+            <a:schemeClr val="accent1"/>
+          </a:lnRef>
+          <a:fillRef idx="3">
+            <a:schemeClr val="accent1"/>
+          </a:fillRef>
+          <a:effectRef idx="2">
+            <a:schemeClr val="accent1"/>
+          </a:effectRef>
+          <a:fontRef idx="minor">
+            <a:schemeClr val="lt1"/>
+          </a:fontRef>
+        </p:style>
+        <p:txBody>
+          <a:bodyPr rtlCol="0" anchor="ctr"/>
+          <a:lstStyle/>
+          <a:p>
+            <a:pPr algn="ctr"/>
+          </a:p>
+        </p:txBody>
+      </p:sp>
+      <p:sp>
+        <p:nvSpPr>
+          <p:cNvPr id="15" name="TextBox 14"/>
+          <p:cNvSpPr txBox="1"/>
+          <p:nvPr/>
+        </p:nvSpPr>
+        <p:spPr>
+          <a:xfrm>
+            <a:off x="6858000" y="1417320"/>
+            <a:ext cx="2103120" cy="502920"/>
+          </a:xfrm>
+          <a:prstGeom prst="rect">
+            <a:avLst/>
+          </a:prstGeom>
+          <a:noFill/>
+        </p:spPr>
+        <p:txBody>
+          <a:bodyPr wrap="none">
+            <a:spAutoFit/>
+          </a:bodyPr>
+          <a:lstStyle/>
+          <a:p>
+            <a:pPr algn="ctr">
+              <a:spcAft>
+                <a:spcPts val="400"/>
+              </a:spcAft>
+              <a:defRPr sz="2200" b="1">
+                <a:solidFill>
+                  <a:srgbClr val="00366A"/>
+                </a:solidFill>
+                <a:latin typeface="Microsoft YaHei"/>
+              </a:defRPr>
+            </a:pPr>
+            <a:r>
+              <a:t>接口统筹</a:t>
+            </a:r>
+          </a:p>
+        </p:txBody>
+      </p:sp>
+      <p:sp>
+        <p:nvSpPr>
+          <p:cNvPr id="16" name="TextBox 15"/>
+          <p:cNvSpPr txBox="1"/>
+          <p:nvPr/>
+        </p:nvSpPr>
+        <p:spPr>
+          <a:xfrm>
+            <a:off x="6858000" y="1965960"/>
+            <a:ext cx="2103120" cy="365760"/>
+          </a:xfrm>
+          <a:prstGeom prst="rect">
+            <a:avLst/>
+          </a:prstGeom>
+          <a:noFill/>
+        </p:spPr>
+        <p:txBody>
+          <a:bodyPr wrap="none">
+            <a:spAutoFit/>
+          </a:bodyPr>
+          <a:lstStyle/>
+          <a:p>
+            <a:pPr algn="ctr">
+              <a:spcAft>
+                <a:spcPts val="400"/>
+              </a:spcAft>
+              <a:defRPr sz="900" b="0">
+                <a:solidFill>
+                  <a:srgbClr val="2C3E50"/>
+                </a:solidFill>
+                <a:latin typeface="Microsoft YaHei"/>
+              </a:defRPr>
+            </a:pPr>
+            <a:r>
+              <a:t>改造/扩建/高活/C1 联动</a:t>
+            </a:r>
+          </a:p>
+        </p:txBody>
+      </p:sp>
+      <p:sp>
+        <p:nvSpPr>
+          <p:cNvPr id="17" name="Rounded Rectangle 16"/>
+          <p:cNvSpPr/>
+          <p:nvPr/>
+        </p:nvSpPr>
+        <p:spPr>
+          <a:xfrm>
+            <a:off x="274320" y="2468880"/>
+            <a:ext cx="2926080" cy="2103120"/>
+          </a:xfrm>
+          <a:prstGeom prst="roundRect">
+            <a:avLst/>
+          </a:prstGeom>
+          <a:solidFill>
+            <a:srgbClr val="FFFFFF"/>
+          </a:solidFill>
+          <a:ln>
+            <a:solidFill>
+              <a:srgbClr val="D4DDE6"/>
+            </a:solidFill>
+          </a:ln>
+        </p:spPr>
+        <p:style>
+          <a:lnRef idx="1">
+            <a:schemeClr val="accent1"/>
+          </a:lnRef>
+          <a:fillRef idx="3">
+            <a:schemeClr val="accent1"/>
+          </a:fillRef>
+          <a:effectRef idx="2">
+            <a:schemeClr val="accent1"/>
+          </a:effectRef>
+          <a:fontRef idx="minor">
+            <a:schemeClr val="lt1"/>
+          </a:fontRef>
+        </p:style>
+        <p:txBody>
+          <a:bodyPr rtlCol="0" anchor="ctr"/>
+          <a:lstStyle/>
+          <a:p>
+            <a:pPr algn="ctr"/>
+          </a:p>
+        </p:txBody>
+      </p:sp>
+      <p:sp>
+        <p:nvSpPr>
+          <p:cNvPr id="18" name="TextBox 17"/>
+          <p:cNvSpPr txBox="1"/>
+          <p:nvPr/>
+        </p:nvSpPr>
+        <p:spPr>
+          <a:xfrm>
+            <a:off x="365760" y="2542032"/>
+            <a:ext cx="2743200" cy="256032"/>
+          </a:xfrm>
+          <a:prstGeom prst="rect">
+            <a:avLst/>
+          </a:prstGeom>
+          <a:noFill/>
+        </p:spPr>
+        <p:txBody>
+          <a:bodyPr wrap="none">
+            <a:spAutoFit/>
+          </a:bodyPr>
+          <a:lstStyle/>
+          <a:p>
+            <a:pPr algn="ctr">
+              <a:spcAft>
+                <a:spcPts val="400"/>
+              </a:spcAft>
+              <a:defRPr sz="950" b="1">
+                <a:solidFill>
+                  <a:srgbClr val="00366A"/>
+                </a:solidFill>
+                <a:latin typeface="Microsoft YaHei"/>
+              </a:defRPr>
+            </a:pPr>
+            <a:r>
+              <a:t>Sandwich 园区 · B902 产能建设示意</a:t>
+            </a:r>
+          </a:p>
+        </p:txBody>
+      </p:sp>
+      <p:sp>
+        <p:nvSpPr>
+          <p:cNvPr id="19" name="Rectangle 18"/>
+          <p:cNvSpPr/>
+          <p:nvPr/>
+        </p:nvSpPr>
+        <p:spPr>
+          <a:xfrm>
+            <a:off x="411480" y="2880360"/>
+            <a:ext cx="1417320" cy="960120"/>
+          </a:xfrm>
+          <a:prstGeom prst="rect">
+            <a:avLst/>
+          </a:prstGeom>
+          <a:solidFill>
+            <a:srgbClr val="E7EEFB"/>
+          </a:solidFill>
+          <a:ln>
+            <a:solidFill>
+              <a:srgbClr val="9AA8B6"/>
+            </a:solidFill>
+          </a:ln>
+        </p:spPr>
+        <p:style>
+          <a:lnRef idx="1">
+            <a:schemeClr val="accent1"/>
+          </a:lnRef>
+          <a:fillRef idx="3">
+            <a:schemeClr val="accent1"/>
+          </a:fillRef>
+          <a:effectRef idx="2">
+            <a:schemeClr val="accent1"/>
+          </a:effectRef>
+          <a:fontRef idx="minor">
+            <a:schemeClr val="lt1"/>
+          </a:fontRef>
+        </p:style>
+        <p:txBody>
+          <a:bodyPr rtlCol="0" anchor="ctr"/>
+          <a:lstStyle/>
+          <a:p>
+            <a:pPr algn="ctr"/>
+          </a:p>
+        </p:txBody>
+      </p:sp>
+      <p:sp>
+        <p:nvSpPr>
+          <p:cNvPr id="20" name="TextBox 19"/>
+          <p:cNvSpPr txBox="1"/>
+          <p:nvPr/>
+        </p:nvSpPr>
+        <p:spPr>
+          <a:xfrm>
+            <a:off x="457200" y="3035808"/>
+            <a:ext cx="1143000" cy="685800"/>
+          </a:xfrm>
+          <a:prstGeom prst="rect">
+            <a:avLst/>
+          </a:prstGeom>
+          <a:noFill/>
+        </p:spPr>
+        <p:txBody>
+          <a:bodyPr wrap="none">
+            <a:spAutoFit/>
+          </a:bodyPr>
+          <a:lstStyle/>
+          <a:p>
+            <a:pPr algn="ctr">
+              <a:spcAft>
+                <a:spcPts val="400"/>
+              </a:spcAft>
+              <a:defRPr sz="800" b="0">
+                <a:solidFill>
+                  <a:srgbClr val="0F2B46"/>
+                </a:solidFill>
+                <a:latin typeface="Microsoft YaHei"/>
+              </a:defRPr>
+            </a:pPr>
+            <a:r>
+              <a:t>既有 B902</a:t>
+            </a:r>
+            <a:br/>
+            <a:r>
+              <a:t>色谱/冻干/密闭升级</a:t>
+            </a:r>
+          </a:p>
+        </p:txBody>
+      </p:sp>
+      <p:sp>
+        <p:nvSpPr>
+          <p:cNvPr id="21" name="Rectangle 20"/>
+          <p:cNvSpPr/>
+          <p:nvPr/>
+        </p:nvSpPr>
+        <p:spPr>
+          <a:xfrm>
+            <a:off x="1920240" y="2880360"/>
+            <a:ext cx="1051560" cy="960120"/>
+          </a:xfrm>
+          <a:prstGeom prst="rect">
+            <a:avLst/>
+          </a:prstGeom>
+          <a:solidFill>
+            <a:srgbClr val="D9EAE8"/>
+          </a:solidFill>
+          <a:ln>
+            <a:solidFill>
+              <a:srgbClr val="009688"/>
+            </a:solidFill>
+          </a:ln>
+        </p:spPr>
+        <p:style>
+          <a:lnRef idx="1">
+            <a:schemeClr val="accent1"/>
+          </a:lnRef>
+          <a:fillRef idx="3">
+            <a:schemeClr val="accent1"/>
+          </a:fillRef>
+          <a:effectRef idx="2">
+            <a:schemeClr val="accent1"/>
+          </a:effectRef>
+          <a:fontRef idx="minor">
+            <a:schemeClr val="lt1"/>
+          </a:fontRef>
+        </p:style>
+        <p:txBody>
+          <a:bodyPr rtlCol="0" anchor="ctr"/>
+          <a:lstStyle/>
+          <a:p>
+            <a:pPr algn="ctr"/>
+          </a:p>
+        </p:txBody>
+      </p:sp>
+      <p:sp>
+        <p:nvSpPr>
+          <p:cNvPr id="22" name="TextBox 21"/>
+          <p:cNvSpPr txBox="1"/>
+          <p:nvPr/>
+        </p:nvSpPr>
+        <p:spPr>
+          <a:xfrm>
+            <a:off x="1783080" y="3090672"/>
+            <a:ext cx="868680" cy="502920"/>
+          </a:xfrm>
+          <a:prstGeom prst="rect">
+            <a:avLst/>
+          </a:prstGeom>
+          <a:noFill/>
+        </p:spPr>
+        <p:txBody>
+          <a:bodyPr wrap="none">
+            <a:spAutoFit/>
+          </a:bodyPr>
+          <a:lstStyle/>
+          <a:p>
+            <a:pPr algn="ctr">
+              <a:spcAft>
+                <a:spcPts val="400"/>
+              </a:spcAft>
+              <a:defRPr sz="800" b="0">
+                <a:solidFill>
+                  <a:srgbClr val="009688"/>
+                </a:solidFill>
+                <a:latin typeface="Microsoft YaHei"/>
+              </a:defRPr>
+            </a:pPr>
+            <a:r>
+              <a:t>东侧扩建</a:t>
+            </a:r>
+            <a:br/>
+            <a:r>
+              <a:t>反应/加氢/过滤</a:t>
+            </a:r>
+          </a:p>
+        </p:txBody>
+      </p:sp>
+      <p:sp>
+        <p:nvSpPr>
+          <p:cNvPr id="23" name="Right Arrow 22"/>
+          <p:cNvSpPr/>
+          <p:nvPr/>
+        </p:nvSpPr>
+        <p:spPr>
+          <a:xfrm>
+            <a:off x="777240" y="3913632"/>
+            <a:ext cx="1920240" cy="201168"/>
+          </a:xfrm>
+          <a:prstGeom prst="rightArrow">
+            <a:avLst/>
+          </a:prstGeom>
+          <a:solidFill>
+            <a:srgbClr val="E8EEF4"/>
+          </a:solidFill>
+          <a:ln>
+            <a:solidFill>
+              <a:srgbClr val="D4DDE6"/>
+            </a:solidFill>
+          </a:ln>
+        </p:spPr>
+        <p:style>
+          <a:lnRef idx="1">
+            <a:schemeClr val="accent1"/>
+          </a:lnRef>
+          <a:fillRef idx="3">
+            <a:schemeClr val="accent1"/>
+          </a:fillRef>
+          <a:effectRef idx="2">
+            <a:schemeClr val="accent1"/>
+          </a:effectRef>
+          <a:fontRef idx="minor">
+            <a:schemeClr val="lt1"/>
+          </a:fontRef>
+        </p:style>
+        <p:txBody>
+          <a:bodyPr rtlCol="0" anchor="ctr"/>
+          <a:lstStyle/>
+          <a:p>
+            <a:pPr algn="ctr"/>
+          </a:p>
+        </p:txBody>
+      </p:sp>
+      <p:sp>
+        <p:nvSpPr>
+          <p:cNvPr id="24" name="TextBox 23"/>
+          <p:cNvSpPr txBox="1"/>
+          <p:nvPr/>
+        </p:nvSpPr>
+        <p:spPr>
+          <a:xfrm>
+            <a:off x="411480" y="4187952"/>
+            <a:ext cx="2651760" cy="320040"/>
+          </a:xfrm>
+          <a:prstGeom prst="rect">
+            <a:avLst/>
+          </a:prstGeom>
+          <a:noFill/>
+        </p:spPr>
+        <p:txBody>
+          <a:bodyPr wrap="none">
+            <a:spAutoFit/>
+          </a:bodyPr>
+          <a:lstStyle/>
+          <a:p>
+            <a:pPr algn="ctr">
+              <a:spcAft>
+                <a:spcPts val="400"/>
+              </a:spcAft>
+              <a:defRPr sz="750" b="0">
+                <a:solidFill>
+                  <a:srgbClr val="2C3E50"/>
+                </a:solidFill>
+                <a:latin typeface="Microsoft YaHei"/>
+              </a:defRPr>
+            </a:pPr>
+            <a:r>
+              <a:t>近期改造兑现 2027 能力  →  扩建 2030 规模化产能</a:t>
+            </a:r>
+          </a:p>
+        </p:txBody>
+      </p:sp>
+      <p:pic>
+        <p:nvPicPr>
+          <p:cNvPr id="25" name="Picture 24" descr="portfolio_overview.png"/>
+          <p:cNvPicPr>
+            <a:picLocks noChangeAspect="1"/>
+          </p:cNvPicPr>
+          <p:nvPr/>
+        </p:nvPicPr>
+        <p:blipFill>
+          <a:blip r:embed="rId2"/>
+          <a:stretch>
+            <a:fillRect/>
+          </a:stretch>
+        </p:blipFill>
+        <p:spPr>
+          <a:xfrm>
+            <a:off x="3383280" y="2468880"/>
+            <a:ext cx="2834640" cy="2103120"/>
+          </a:xfrm>
+          <a:prstGeom prst="rect">
+            <a:avLst/>
+          </a:prstGeom>
+        </p:spPr>
+      </p:pic>
+      <p:graphicFrame>
+        <p:nvGraphicFramePr>
+          <p:cNvPr id="26" name="Table 25"/>
+          <p:cNvGraphicFramePr>
+            <a:graphicFrameLocks noGrp="1"/>
+          </p:cNvGraphicFramePr>
+          <p:nvPr/>
+        </p:nvGraphicFramePr>
+        <p:xfrm>
+          <a:off x="6355080" y="2468880"/>
+          <a:ext cx="2514600" cy="2103120"/>
+        </p:xfrm>
+        <a:graphic>
+          <a:graphicData uri="http://schemas.openxmlformats.org/drawingml/2006/table">
+            <a:tbl>
+              <a:tblPr firstRow="1" bandRow="1">
+                <a:tableStyleId>{5C22544A-7EE6-4342-B048-85BDC9FD1C3A}</a:tableStyleId>
+              </a:tblPr>
+              <a:tblGrid>
+                <a:gridCol w="838200"/>
+                <a:gridCol w="838200"/>
+                <a:gridCol w="838200"/>
+              </a:tblGrid>
+              <a:tr h="350520">
+                <a:tc>
+                  <a:txBody>
+                    <a:bodyPr/>
+                    <a:lstStyle/>
+                    <a:p>
+                      <a:pPr>
+                        <a:defRPr sz="800" b="1">
+                          <a:solidFill>
+                            <a:srgbClr val="FFFFFF"/>
+                          </a:solidFill>
+                          <a:latin typeface="Microsoft YaHei"/>
+                        </a:defRPr>
+                      </a:pPr>
+                      <a:r>
+                        <a:t>维度</a:t>
+                      </a:r>
+                    </a:p>
+                  </a:txBody>
+                  <a:tcPr>
+                    <a:solidFill>
+                      <a:srgbClr val="00366A"/>
+                    </a:solidFill>
+                  </a:tcPr>
+                </a:tc>
+                <a:tc>
+                  <a:txBody>
+                    <a:bodyPr/>
+                    <a:lstStyle/>
+                    <a:p>
+                      <a:pPr>
+                        <a:defRPr sz="800" b="1">
+                          <a:solidFill>
+                            <a:srgbClr val="FFFFFF"/>
+                          </a:solidFill>
+                          <a:latin typeface="Microsoft YaHei"/>
+                        </a:defRPr>
+                      </a:pPr>
+                      <a:r>
+                        <a:t>HPLC/冻干改造</a:t>
+                      </a:r>
+                    </a:p>
+                  </a:txBody>
+                  <a:tcPr>
+                    <a:solidFill>
+                      <a:srgbClr val="00366A"/>
+                    </a:solidFill>
+                  </a:tcPr>
+                </a:tc>
+                <a:tc>
+                  <a:txBody>
+                    <a:bodyPr/>
+                    <a:lstStyle/>
+                    <a:p>
+                      <a:pPr>
+                        <a:defRPr sz="800" b="1">
+                          <a:solidFill>
+                            <a:srgbClr val="FFFFFF"/>
+                          </a:solidFill>
+                          <a:latin typeface="Microsoft YaHei"/>
+                        </a:defRPr>
+                      </a:pPr>
+                      <a:r>
+                        <a:t>902 东侧扩建</a:t>
+                      </a:r>
+                    </a:p>
+                  </a:txBody>
+                  <a:tcPr>
+                    <a:solidFill>
+                      <a:srgbClr val="00366A"/>
+                    </a:solidFill>
+                  </a:tcPr>
+                </a:tc>
+              </a:tr>
+              <a:tr h="350520">
+                <a:tc>
+                  <a:txBody>
+                    <a:bodyPr/>
+                    <a:lstStyle/>
+                    <a:p>
+                      <a:pPr>
+                        <a:defRPr sz="750" b="1">
+                          <a:solidFill>
+                            <a:srgbClr val="2C3E50"/>
+                          </a:solidFill>
+                          <a:latin typeface="Microsoft YaHei"/>
+                        </a:defRPr>
+                      </a:pPr>
+                      <a:r>
+                        <a:t>定位</a:t>
+                      </a:r>
+                    </a:p>
+                  </a:txBody>
+                  <a:tcPr/>
+                </a:tc>
+                <a:tc>
+                  <a:txBody>
+                    <a:bodyPr/>
+                    <a:lstStyle/>
+                    <a:p>
+                      <a:pPr>
+                        <a:defRPr sz="750" b="0">
+                          <a:solidFill>
+                            <a:srgbClr val="0F2B46"/>
+                          </a:solidFill>
+                          <a:latin typeface="Microsoft YaHei"/>
+                        </a:defRPr>
+                      </a:pPr>
+                      <a:r>
+                        <a:t>近期投产能力</a:t>
+                      </a:r>
+                    </a:p>
+                  </a:txBody>
+                  <a:tcPr/>
+                </a:tc>
+                <a:tc>
+                  <a:txBody>
+                    <a:bodyPr/>
+                    <a:lstStyle/>
+                    <a:p>
+                      <a:pPr>
+                        <a:defRPr sz="750" b="0">
+                          <a:solidFill>
+                            <a:srgbClr val="0F2B46"/>
+                          </a:solidFill>
+                          <a:latin typeface="Microsoft YaHei"/>
+                        </a:defRPr>
+                      </a:pPr>
+                      <a:r>
+                        <a:t>中长期规模化产能</a:t>
+                      </a:r>
+                    </a:p>
+                  </a:txBody>
+                  <a:tcPr/>
+                </a:tc>
+              </a:tr>
+              <a:tr h="350520">
+                <a:tc>
+                  <a:txBody>
+                    <a:bodyPr/>
+                    <a:lstStyle/>
+                    <a:p>
+                      <a:pPr>
+                        <a:defRPr sz="750" b="1">
+                          <a:solidFill>
+                            <a:srgbClr val="2C3E50"/>
+                          </a:solidFill>
+                          <a:latin typeface="Microsoft YaHei"/>
+                        </a:defRPr>
+                      </a:pPr>
+                      <a:r>
+                        <a:t>投资 OOM</a:t>
+                      </a:r>
+                    </a:p>
+                  </a:txBody>
+                  <a:tcPr/>
+                </a:tc>
+                <a:tc>
+                  <a:txBody>
+                    <a:bodyPr/>
+                    <a:lstStyle/>
+                    <a:p>
+                      <a:pPr>
+                        <a:defRPr sz="750" b="0">
+                          <a:solidFill>
+                            <a:srgbClr val="0F2B46"/>
+                          </a:solidFill>
+                          <a:latin typeface="Microsoft YaHei"/>
+                        </a:defRPr>
+                      </a:pPr>
+                      <a:r>
+                        <a:t>£5.67M</a:t>
+                      </a:r>
+                    </a:p>
+                  </a:txBody>
+                  <a:tcPr/>
+                </a:tc>
+                <a:tc>
+                  <a:txBody>
+                    <a:bodyPr/>
+                    <a:lstStyle/>
+                    <a:p>
+                      <a:pPr>
+                        <a:defRPr sz="750" b="0">
+                          <a:solidFill>
+                            <a:srgbClr val="0F2B46"/>
+                          </a:solidFill>
+                          <a:latin typeface="Microsoft YaHei"/>
+                        </a:defRPr>
+                      </a:pPr>
+                      <a:r>
+                        <a:t>£78.11M</a:t>
+                      </a:r>
+                    </a:p>
+                  </a:txBody>
+                  <a:tcPr/>
+                </a:tc>
+              </a:tr>
+              <a:tr h="350520">
+                <a:tc>
+                  <a:txBody>
+                    <a:bodyPr/>
+                    <a:lstStyle/>
+                    <a:p>
+                      <a:pPr>
+                        <a:defRPr sz="750" b="1">
+                          <a:solidFill>
+                            <a:srgbClr val="2C3E50"/>
+                          </a:solidFill>
+                          <a:latin typeface="Microsoft YaHei"/>
+                        </a:defRPr>
+                      </a:pPr>
+                      <a:r>
+                        <a:t>关键节点</a:t>
+                      </a:r>
+                    </a:p>
+                  </a:txBody>
+                  <a:tcPr/>
+                </a:tc>
+                <a:tc>
+                  <a:txBody>
+                    <a:bodyPr/>
+                    <a:lstStyle/>
+                    <a:p>
+                      <a:pPr>
+                        <a:defRPr sz="750" b="0">
+                          <a:solidFill>
+                            <a:srgbClr val="0F2B46"/>
+                          </a:solidFill>
+                          <a:latin typeface="Microsoft YaHei"/>
+                        </a:defRPr>
+                      </a:pPr>
+                      <a:r>
+                        <a:t>2027 Q3–Q4</a:t>
+                      </a:r>
+                    </a:p>
+                  </a:txBody>
+                  <a:tcPr/>
+                </a:tc>
+                <a:tc>
+                  <a:txBody>
+                    <a:bodyPr/>
+                    <a:lstStyle/>
+                    <a:p>
+                      <a:pPr>
+                        <a:defRPr sz="750" b="0">
+                          <a:solidFill>
+                            <a:srgbClr val="0F2B46"/>
+                          </a:solidFill>
+                          <a:latin typeface="Microsoft YaHei"/>
+                        </a:defRPr>
+                      </a:pPr>
+                      <a:r>
+                        <a:t>2030-05 竣工</a:t>
+                      </a:r>
+                    </a:p>
+                  </a:txBody>
+                  <a:tcPr/>
+                </a:tc>
+              </a:tr>
+              <a:tr h="350520">
+                <a:tc>
+                  <a:txBody>
+                    <a:bodyPr/>
+                    <a:lstStyle/>
+                    <a:p>
+                      <a:pPr>
+                        <a:defRPr sz="750" b="1">
+                          <a:solidFill>
+                            <a:srgbClr val="2C3E50"/>
+                          </a:solidFill>
+                          <a:latin typeface="Microsoft YaHei"/>
+                        </a:defRPr>
+                      </a:pPr>
+                      <a:r>
+                        <a:t>上半年</a:t>
+                      </a:r>
+                    </a:p>
+                  </a:txBody>
+                  <a:tcPr/>
+                </a:tc>
+                <a:tc>
+                  <a:txBody>
+                    <a:bodyPr/>
+                    <a:lstStyle/>
+                    <a:p>
+                      <a:pPr>
+                        <a:defRPr sz="750" b="0">
+                          <a:solidFill>
+                            <a:srgbClr val="0F2B46"/>
+                          </a:solidFill>
+                          <a:latin typeface="Microsoft YaHei"/>
+                        </a:defRPr>
+                      </a:pPr>
+                      <a:r>
+                        <a:t>FS + 投资框架</a:t>
+                      </a:r>
+                    </a:p>
+                  </a:txBody>
+                  <a:tcPr/>
+                </a:tc>
+                <a:tc>
+                  <a:txBody>
+                    <a:bodyPr/>
+                    <a:lstStyle/>
+                    <a:p>
+                      <a:pPr>
+                        <a:defRPr sz="750" b="0">
+                          <a:solidFill>
+                            <a:srgbClr val="0F2B46"/>
+                          </a:solidFill>
+                          <a:latin typeface="Microsoft YaHei"/>
+                        </a:defRPr>
+                      </a:pPr>
+                      <a:r>
+                        <a:t>RIBA 1 完成（5月）</a:t>
+                      </a:r>
+                    </a:p>
+                  </a:txBody>
+                  <a:tcPr/>
+                </a:tc>
+              </a:tr>
+              <a:tr h="350520">
+                <a:tc>
+                  <a:txBody>
+                    <a:bodyPr/>
+                    <a:lstStyle/>
+                    <a:p>
+                      <a:pPr>
+                        <a:defRPr sz="750" b="1">
+                          <a:solidFill>
+                            <a:srgbClr val="2C3E50"/>
+                          </a:solidFill>
+                          <a:latin typeface="Microsoft YaHei"/>
+                        </a:defRPr>
+                      </a:pPr>
+                      <a:r>
+                        <a:t>下半年</a:t>
+                      </a:r>
+                    </a:p>
+                  </a:txBody>
+                  <a:tcPr/>
+                </a:tc>
+                <a:tc>
+                  <a:txBody>
+                    <a:bodyPr/>
+                    <a:lstStyle/>
+                    <a:p>
+                      <a:pPr>
+                        <a:defRPr sz="750" b="0">
+                          <a:solidFill>
+                            <a:srgbClr val="0F2B46"/>
+                          </a:solidFill>
+                          <a:latin typeface="Microsoft YaHei"/>
+                        </a:defRPr>
+                      </a:pPr>
+                      <a:r>
+                        <a:t>FEED / 长周期采购</a:t>
+                      </a:r>
+                    </a:p>
+                  </a:txBody>
+                  <a:tcPr/>
+                </a:tc>
+                <a:tc>
+                  <a:txBody>
+                    <a:bodyPr/>
+                    <a:lstStyle/>
+                    <a:p>
+                      <a:pPr>
+                        <a:defRPr sz="750" b="0">
+                          <a:solidFill>
+                            <a:srgbClr val="0F2B46"/>
+                          </a:solidFill>
+                          <a:latin typeface="Microsoft YaHei"/>
+                        </a:defRPr>
+                      </a:pPr>
+                      <a:r>
+                        <a:t>RIBA 2 概念设计</a:t>
+                      </a:r>
+                    </a:p>
+                  </a:txBody>
+                  <a:tcPr/>
+                </a:tc>
+              </a:tr>
+            </a:tbl>
+          </a:graphicData>
+        </a:graphic>
+      </p:graphicFrame>
+      <p:sp>
+        <p:nvSpPr>
+          <p:cNvPr id="27" name="TextBox 26"/>
+          <p:cNvSpPr txBox="1"/>
+          <p:nvPr/>
+        </p:nvSpPr>
+        <p:spPr>
+          <a:xfrm>
+            <a:off x="274320" y="4892040"/>
+            <a:ext cx="2103120" cy="182880"/>
+          </a:xfrm>
+          <a:prstGeom prst="rect">
+            <a:avLst/>
+          </a:prstGeom>
+          <a:noFill/>
+        </p:spPr>
+        <p:txBody>
+          <a:bodyPr wrap="none">
+            <a:spAutoFit/>
+          </a:bodyPr>
+          <a:lstStyle/>
+          <a:p>
+            <a:pPr algn="l">
+              <a:spcAft>
+                <a:spcPts val="400"/>
+              </a:spcAft>
+              <a:defRPr sz="700" b="0">
+                <a:solidFill>
+                  <a:srgbClr val="2C3E50"/>
+                </a:solidFill>
+                <a:latin typeface="Microsoft YaHei"/>
+              </a:defRPr>
+            </a:pPr>
+            <a:r>
+              <a:t>www.asymchem.com.cn</a:t>
+            </a:r>
+          </a:p>
+        </p:txBody>
+      </p:sp>
+      <p:sp>
+        <p:nvSpPr>
+          <p:cNvPr id="28" name="TextBox 27"/>
+          <p:cNvSpPr txBox="1"/>
+          <p:nvPr/>
+        </p:nvSpPr>
+        <p:spPr>
+          <a:xfrm>
+            <a:off x="2377440" y="4892040"/>
+            <a:ext cx="2286000" cy="182880"/>
+          </a:xfrm>
+          <a:prstGeom prst="rect">
+            <a:avLst/>
+          </a:prstGeom>
+          <a:noFill/>
+        </p:spPr>
+        <p:txBody>
+          <a:bodyPr wrap="none">
+            <a:spAutoFit/>
+          </a:bodyPr>
+          <a:lstStyle/>
+          <a:p>
+            <a:pPr algn="l">
+              <a:spcAft>
+                <a:spcPts val="400"/>
+              </a:spcAft>
+              <a:defRPr sz="700" b="0">
+                <a:solidFill>
+                  <a:srgbClr val="2C3E50"/>
+                </a:solidFill>
+                <a:latin typeface="Microsoft YaHei"/>
+              </a:defRPr>
+            </a:pPr>
+            <a:r>
+              <a:t>Stock Code: 002821.SZ / 6821.HK</a:t>
+            </a:r>
+          </a:p>
+        </p:txBody>
+      </p:sp>
+      <p:sp>
+        <p:nvSpPr>
+          <p:cNvPr id="29" name="TextBox 28"/>
+          <p:cNvSpPr txBox="1"/>
+          <p:nvPr/>
+        </p:nvSpPr>
+        <p:spPr>
+          <a:xfrm>
+            <a:off x="8595360" y="4892040"/>
+            <a:ext cx="457200" cy="182880"/>
+          </a:xfrm>
+          <a:prstGeom prst="rect">
+            <a:avLst/>
+          </a:prstGeom>
+          <a:noFill/>
+        </p:spPr>
+        <p:txBody>
+          <a:bodyPr wrap="none">
+            <a:spAutoFit/>
+          </a:bodyPr>
+          <a:lstStyle/>
+          <a:p>
+            <a:pPr algn="r">
+              <a:spcAft>
+                <a:spcPts val="400"/>
+              </a:spcAft>
+              <a:defRPr sz="700" b="0">
+                <a:solidFill>
+                  <a:srgbClr val="2C3E50"/>
+                </a:solidFill>
+                <a:latin typeface="Microsoft YaHei"/>
+              </a:defRPr>
+            </a:pPr>
+            <a:r>
+              <a:t>7</a:t>
+            </a:r>
+          </a:p>
+        </p:txBody>
+      </p:sp>
+    </p:spTree>
+  </p:cSld>
+  <p:clrMapOvr>
+    <a:masterClrMapping/>
+  </p:clrMapOvr>
+</p:sld>
+</file>
+
+<file path=ppt/slides/slide14.xml><?xml version="1.0" encoding="utf-8"?>
+<p:sld xmlns:a="http://schemas.openxmlformats.org/drawingml/2006/main" xmlns:p="http://schemas.openxmlformats.org/presentationml/2006/main" xmlns:r="http://schemas.openxmlformats.org/officeDocument/2006/relationships">
+  <p:cSld>
+    <p:spTree>
+      <p:nvGrpSpPr>
+        <p:cNvPr id="1" name=""/>
+        <p:cNvGrpSpPr/>
+        <p:nvPr/>
+      </p:nvGrpSpPr>
+      <p:grpSpPr/>
+      <p:sp>
+        <p:nvSpPr>
+          <p:cNvPr id="2" name="TextBox 1"/>
+          <p:cNvSpPr txBox="1"/>
+          <p:nvPr/>
+        </p:nvSpPr>
+        <p:spPr>
+          <a:xfrm>
+            <a:off x="3200400" y="182880"/>
+            <a:ext cx="5760720" cy="457200"/>
+          </a:xfrm>
+          <a:prstGeom prst="rect">
+            <a:avLst/>
+          </a:prstGeom>
+          <a:noFill/>
+        </p:spPr>
+        <p:txBody>
+          <a:bodyPr wrap="none">
+            <a:spAutoFit/>
+          </a:bodyPr>
+          <a:lstStyle/>
+          <a:p>
+            <a:pPr algn="l">
+              <a:spcAft>
+                <a:spcPts val="400"/>
+              </a:spcAft>
+              <a:defRPr sz="2000" b="1">
+                <a:solidFill>
+                  <a:srgbClr val="00366A"/>
+                </a:solidFill>
+                <a:latin typeface="Microsoft YaHei"/>
+              </a:defRPr>
+            </a:pPr>
+            <a:r>
+              <a:t>制备色谱 &amp; 冻干机改造 · 上半年推进主线</a:t>
+            </a:r>
+          </a:p>
+        </p:txBody>
+      </p:sp>
+      <p:sp>
+        <p:nvSpPr>
+          <p:cNvPr id="3" name="Rectangle 2"/>
+          <p:cNvSpPr/>
+          <p:nvPr/>
+        </p:nvSpPr>
+        <p:spPr>
+          <a:xfrm>
+            <a:off x="274320" y="777240"/>
+            <a:ext cx="8595360" cy="27432"/>
+          </a:xfrm>
+          <a:prstGeom prst="rect">
+            <a:avLst/>
+          </a:prstGeom>
+          <a:solidFill>
+            <a:srgbClr val="FF7E3D"/>
+          </a:solidFill>
+          <a:ln>
+            <a:noFill/>
+          </a:ln>
+        </p:spPr>
+        <p:style>
+          <a:lnRef idx="1">
+            <a:schemeClr val="accent1"/>
+          </a:lnRef>
+          <a:fillRef idx="3">
+            <a:schemeClr val="accent1"/>
+          </a:fillRef>
+          <a:effectRef idx="2">
+            <a:schemeClr val="accent1"/>
+          </a:effectRef>
+          <a:fontRef idx="minor">
+            <a:schemeClr val="lt1"/>
+          </a:fontRef>
+        </p:style>
+        <p:txBody>
+          <a:bodyPr rtlCol="0" anchor="ctr"/>
+          <a:lstStyle/>
+          <a:p>
+            <a:pPr algn="ctr"/>
+          </a:p>
+        </p:txBody>
+      </p:sp>
+      <p:sp>
+        <p:nvSpPr>
+          <p:cNvPr id="4" name="TextBox 3"/>
+          <p:cNvSpPr txBox="1"/>
+          <p:nvPr/>
+        </p:nvSpPr>
+        <p:spPr>
+          <a:xfrm>
+            <a:off x="274320" y="914400"/>
+            <a:ext cx="8595360" cy="329184"/>
+          </a:xfrm>
+          <a:prstGeom prst="rect">
+            <a:avLst/>
+          </a:prstGeom>
+          <a:noFill/>
+        </p:spPr>
+        <p:txBody>
+          <a:bodyPr wrap="none">
+            <a:spAutoFit/>
+          </a:bodyPr>
+          <a:lstStyle/>
+          <a:p>
+            <a:pPr algn="l">
+              <a:spcAft>
+                <a:spcPts val="400"/>
+              </a:spcAft>
+              <a:defRPr sz="950" b="0">
+                <a:solidFill>
+                  <a:srgbClr val="2C3E50"/>
+                </a:solidFill>
+                <a:latin typeface="Microsoft YaHei"/>
+              </a:defRPr>
+            </a:pPr>
+            <a:r>
+              <a:t>技术可行性研究已完成；投资框架明确；冻干机长周期驱动分期实施</a:t>
+            </a:r>
+          </a:p>
+        </p:txBody>
+      </p:sp>
+      <p:sp>
+        <p:nvSpPr>
+          <p:cNvPr id="5" name="Rounded Rectangle 4"/>
+          <p:cNvSpPr/>
+          <p:nvPr/>
+        </p:nvSpPr>
+        <p:spPr>
+          <a:xfrm>
+            <a:off x="274320" y="1325880"/>
+            <a:ext cx="2103120" cy="1051560"/>
+          </a:xfrm>
+          <a:prstGeom prst="roundRect">
+            <a:avLst/>
+          </a:prstGeom>
+          <a:solidFill>
+            <a:srgbClr val="E7EEFB"/>
+          </a:solidFill>
+          <a:ln>
+            <a:noFill/>
+          </a:ln>
+        </p:spPr>
+        <p:style>
+          <a:lnRef idx="1">
+            <a:schemeClr val="accent1"/>
+          </a:lnRef>
+          <a:fillRef idx="3">
+            <a:schemeClr val="accent1"/>
+          </a:fillRef>
+          <a:effectRef idx="2">
+            <a:schemeClr val="accent1"/>
+          </a:effectRef>
+          <a:fontRef idx="minor">
+            <a:schemeClr val="lt1"/>
+          </a:fontRef>
+        </p:style>
+        <p:txBody>
+          <a:bodyPr rtlCol="0" anchor="ctr"/>
+          <a:lstStyle/>
+          <a:p>
+            <a:pPr algn="ctr"/>
+          </a:p>
+        </p:txBody>
+      </p:sp>
+      <p:sp>
+        <p:nvSpPr>
+          <p:cNvPr id="6" name="TextBox 5"/>
+          <p:cNvSpPr txBox="1"/>
+          <p:nvPr/>
+        </p:nvSpPr>
+        <p:spPr>
+          <a:xfrm>
+            <a:off x="274320" y="1417320"/>
+            <a:ext cx="2103120" cy="502920"/>
+          </a:xfrm>
+          <a:prstGeom prst="rect">
+            <a:avLst/>
+          </a:prstGeom>
+          <a:noFill/>
+        </p:spPr>
+        <p:txBody>
+          <a:bodyPr wrap="none">
+            <a:spAutoFit/>
+          </a:bodyPr>
+          <a:lstStyle/>
+          <a:p>
+            <a:pPr algn="ctr">
+              <a:spcAft>
+                <a:spcPts val="400"/>
+              </a:spcAft>
+              <a:defRPr sz="2200" b="1">
+                <a:solidFill>
+                  <a:srgbClr val="00366A"/>
+                </a:solidFill>
+                <a:latin typeface="Microsoft YaHei"/>
+              </a:defRPr>
+            </a:pPr>
+            <a:r>
+              <a:t>FS 完成</a:t>
+            </a:r>
+          </a:p>
+        </p:txBody>
+      </p:sp>
+      <p:sp>
+        <p:nvSpPr>
+          <p:cNvPr id="7" name="TextBox 6"/>
+          <p:cNvSpPr txBox="1"/>
+          <p:nvPr/>
+        </p:nvSpPr>
+        <p:spPr>
+          <a:xfrm>
+            <a:off x="274320" y="1965960"/>
+            <a:ext cx="2103120" cy="365760"/>
+          </a:xfrm>
+          <a:prstGeom prst="rect">
+            <a:avLst/>
+          </a:prstGeom>
+          <a:noFill/>
+        </p:spPr>
+        <p:txBody>
+          <a:bodyPr wrap="none">
+            <a:spAutoFit/>
+          </a:bodyPr>
+          <a:lstStyle/>
+          <a:p>
+            <a:pPr algn="ctr">
+              <a:spcAft>
+                <a:spcPts val="400"/>
+              </a:spcAft>
+              <a:defRPr sz="900" b="0">
+                <a:solidFill>
+                  <a:srgbClr val="2C3E50"/>
+                </a:solidFill>
+                <a:latin typeface="Microsoft YaHei"/>
+              </a:defRPr>
+            </a:pPr>
+            <a:r>
+              <a:t>可行性研究 P01</a:t>
+            </a:r>
+          </a:p>
+        </p:txBody>
+      </p:sp>
+      <p:sp>
+        <p:nvSpPr>
+          <p:cNvPr id="8" name="Rounded Rectangle 7"/>
+          <p:cNvSpPr/>
+          <p:nvPr/>
+        </p:nvSpPr>
+        <p:spPr>
+          <a:xfrm>
+            <a:off x="2468880" y="1325880"/>
+            <a:ext cx="2103120" cy="1051560"/>
+          </a:xfrm>
+          <a:prstGeom prst="roundRect">
+            <a:avLst/>
+          </a:prstGeom>
+          <a:solidFill>
+            <a:srgbClr val="E7EEFB"/>
+          </a:solidFill>
+          <a:ln>
+            <a:noFill/>
+          </a:ln>
+        </p:spPr>
+        <p:style>
+          <a:lnRef idx="1">
+            <a:schemeClr val="accent1"/>
+          </a:lnRef>
+          <a:fillRef idx="3">
+            <a:schemeClr val="accent1"/>
+          </a:fillRef>
+          <a:effectRef idx="2">
+            <a:schemeClr val="accent1"/>
+          </a:effectRef>
+          <a:fontRef idx="minor">
+            <a:schemeClr val="lt1"/>
+          </a:fontRef>
+        </p:style>
+        <p:txBody>
+          <a:bodyPr rtlCol="0" anchor="ctr"/>
+          <a:lstStyle/>
+          <a:p>
+            <a:pPr algn="ctr"/>
+          </a:p>
+        </p:txBody>
+      </p:sp>
+      <p:sp>
+        <p:nvSpPr>
+          <p:cNvPr id="9" name="TextBox 8"/>
+          <p:cNvSpPr txBox="1"/>
+          <p:nvPr/>
+        </p:nvSpPr>
+        <p:spPr>
+          <a:xfrm>
+            <a:off x="2468880" y="1417320"/>
+            <a:ext cx="2103120" cy="502920"/>
+          </a:xfrm>
+          <a:prstGeom prst="rect">
+            <a:avLst/>
+          </a:prstGeom>
+          <a:noFill/>
+        </p:spPr>
+        <p:txBody>
+          <a:bodyPr wrap="none">
+            <a:spAutoFit/>
+          </a:bodyPr>
+          <a:lstStyle/>
+          <a:p>
+            <a:pPr algn="ctr">
+              <a:spcAft>
+                <a:spcPts val="400"/>
+              </a:spcAft>
+              <a:defRPr sz="2200" b="1">
+                <a:solidFill>
+                  <a:srgbClr val="00366A"/>
+                </a:solidFill>
+                <a:latin typeface="Microsoft YaHei"/>
+              </a:defRPr>
+            </a:pPr>
+            <a:r>
+              <a:t>£5.67M</a:t>
+            </a:r>
+          </a:p>
+        </p:txBody>
+      </p:sp>
+      <p:sp>
+        <p:nvSpPr>
+          <p:cNvPr id="10" name="TextBox 9"/>
+          <p:cNvSpPr txBox="1"/>
+          <p:nvPr/>
+        </p:nvSpPr>
+        <p:spPr>
+          <a:xfrm>
+            <a:off x="2468880" y="1965960"/>
+            <a:ext cx="2103120" cy="365760"/>
+          </a:xfrm>
+          <a:prstGeom prst="rect">
+            <a:avLst/>
+          </a:prstGeom>
+          <a:noFill/>
+        </p:spPr>
+        <p:txBody>
+          <a:bodyPr wrap="none">
+            <a:spAutoFit/>
+          </a:bodyPr>
+          <a:lstStyle/>
+          <a:p>
+            <a:pPr algn="ctr">
+              <a:spcAft>
+                <a:spcPts val="400"/>
+              </a:spcAft>
+              <a:defRPr sz="900" b="0">
+                <a:solidFill>
+                  <a:srgbClr val="2C3E50"/>
+                </a:solidFill>
+                <a:latin typeface="Microsoft YaHei"/>
+              </a:defRPr>
+            </a:pPr>
+            <a:r>
+              <a:t>OOM（可行性量级）</a:t>
+            </a:r>
+          </a:p>
+        </p:txBody>
+      </p:sp>
+      <p:sp>
+        <p:nvSpPr>
+          <p:cNvPr id="11" name="Rounded Rectangle 10"/>
+          <p:cNvSpPr/>
+          <p:nvPr/>
+        </p:nvSpPr>
+        <p:spPr>
+          <a:xfrm>
+            <a:off x="4663440" y="1325880"/>
+            <a:ext cx="2103120" cy="1051560"/>
+          </a:xfrm>
+          <a:prstGeom prst="roundRect">
+            <a:avLst/>
+          </a:prstGeom>
+          <a:solidFill>
+            <a:srgbClr val="E7EEFB"/>
+          </a:solidFill>
+          <a:ln>
+            <a:noFill/>
+          </a:ln>
+        </p:spPr>
+        <p:style>
+          <a:lnRef idx="1">
+            <a:schemeClr val="accent1"/>
+          </a:lnRef>
+          <a:fillRef idx="3">
+            <a:schemeClr val="accent1"/>
+          </a:fillRef>
+          <a:effectRef idx="2">
+            <a:schemeClr val="accent1"/>
+          </a:effectRef>
+          <a:fontRef idx="minor">
+            <a:schemeClr val="lt1"/>
+          </a:fontRef>
+        </p:style>
+        <p:txBody>
+          <a:bodyPr rtlCol="0" anchor="ctr"/>
+          <a:lstStyle/>
+          <a:p>
+            <a:pPr algn="ctr"/>
+          </a:p>
+        </p:txBody>
+      </p:sp>
+      <p:sp>
+        <p:nvSpPr>
+          <p:cNvPr id="12" name="TextBox 11"/>
+          <p:cNvSpPr txBox="1"/>
+          <p:nvPr/>
+        </p:nvSpPr>
+        <p:spPr>
+          <a:xfrm>
+            <a:off x="4663440" y="1417320"/>
+            <a:ext cx="2103120" cy="502920"/>
+          </a:xfrm>
+          <a:prstGeom prst="rect">
+            <a:avLst/>
+          </a:prstGeom>
+          <a:noFill/>
+        </p:spPr>
+        <p:txBody>
+          <a:bodyPr wrap="none">
+            <a:spAutoFit/>
+          </a:bodyPr>
+          <a:lstStyle/>
+          <a:p>
+            <a:pPr algn="ctr">
+              <a:spcAft>
+                <a:spcPts val="400"/>
+              </a:spcAft>
+              <a:defRPr sz="2200" b="1">
+                <a:solidFill>
+                  <a:srgbClr val="00366A"/>
+                </a:solidFill>
+                <a:latin typeface="Microsoft YaHei"/>
+              </a:defRPr>
+            </a:pPr>
+            <a:r>
+              <a:t>2027-09</a:t>
+            </a:r>
+          </a:p>
+        </p:txBody>
+      </p:sp>
+      <p:sp>
+        <p:nvSpPr>
+          <p:cNvPr id="13" name="TextBox 12"/>
+          <p:cNvSpPr txBox="1"/>
+          <p:nvPr/>
+        </p:nvSpPr>
+        <p:spPr>
+          <a:xfrm>
+            <a:off x="4663440" y="1965960"/>
+            <a:ext cx="2103120" cy="365760"/>
+          </a:xfrm>
+          <a:prstGeom prst="rect">
+            <a:avLst/>
+          </a:prstGeom>
+          <a:noFill/>
+        </p:spPr>
+        <p:txBody>
+          <a:bodyPr wrap="none">
+            <a:spAutoFit/>
+          </a:bodyPr>
+          <a:lstStyle/>
+          <a:p>
+            <a:pPr algn="ctr">
+              <a:spcAft>
+                <a:spcPts val="400"/>
+              </a:spcAft>
+              <a:defRPr sz="900" b="0">
+                <a:solidFill>
+                  <a:srgbClr val="2C3E50"/>
+                </a:solidFill>
+                <a:latin typeface="Microsoft YaHei"/>
+              </a:defRPr>
+            </a:pPr>
+            <a:r>
+              <a:t>HPLC 目标投运</a:t>
+            </a:r>
+          </a:p>
+        </p:txBody>
+      </p:sp>
+      <p:sp>
+        <p:nvSpPr>
+          <p:cNvPr id="14" name="Rounded Rectangle 13"/>
+          <p:cNvSpPr/>
+          <p:nvPr/>
+        </p:nvSpPr>
+        <p:spPr>
+          <a:xfrm>
+            <a:off x="6858000" y="1325880"/>
+            <a:ext cx="2103120" cy="1051560"/>
+          </a:xfrm>
+          <a:prstGeom prst="roundRect">
+            <a:avLst/>
+          </a:prstGeom>
+          <a:solidFill>
+            <a:srgbClr val="E7EEFB"/>
+          </a:solidFill>
+          <a:ln>
+            <a:noFill/>
+          </a:ln>
+        </p:spPr>
+        <p:style>
+          <a:lnRef idx="1">
+            <a:schemeClr val="accent1"/>
+          </a:lnRef>
+          <a:fillRef idx="3">
+            <a:schemeClr val="accent1"/>
+          </a:fillRef>
+          <a:effectRef idx="2">
+            <a:schemeClr val="accent1"/>
+          </a:effectRef>
+          <a:fontRef idx="minor">
+            <a:schemeClr val="lt1"/>
+          </a:fontRef>
+        </p:style>
+        <p:txBody>
+          <a:bodyPr rtlCol="0" anchor="ctr"/>
+          <a:lstStyle/>
+          <a:p>
+            <a:pPr algn="ctr"/>
+          </a:p>
+        </p:txBody>
+      </p:sp>
+      <p:sp>
+        <p:nvSpPr>
+          <p:cNvPr id="15" name="TextBox 14"/>
+          <p:cNvSpPr txBox="1"/>
+          <p:nvPr/>
+        </p:nvSpPr>
+        <p:spPr>
+          <a:xfrm>
+            <a:off x="6858000" y="1417320"/>
+            <a:ext cx="2103120" cy="502920"/>
+          </a:xfrm>
+          <a:prstGeom prst="rect">
+            <a:avLst/>
+          </a:prstGeom>
+          <a:noFill/>
+        </p:spPr>
+        <p:txBody>
+          <a:bodyPr wrap="none">
+            <a:spAutoFit/>
+          </a:bodyPr>
+          <a:lstStyle/>
+          <a:p>
+            <a:pPr algn="ctr">
+              <a:spcAft>
+                <a:spcPts val="400"/>
+              </a:spcAft>
+              <a:defRPr sz="2200" b="1">
+                <a:solidFill>
+                  <a:srgbClr val="00366A"/>
+                </a:solidFill>
+                <a:latin typeface="Microsoft YaHei"/>
+              </a:defRPr>
+            </a:pPr>
+            <a:r>
+              <a:t>2027-12</a:t>
+            </a:r>
+          </a:p>
+        </p:txBody>
+      </p:sp>
+      <p:sp>
+        <p:nvSpPr>
+          <p:cNvPr id="16" name="TextBox 15"/>
+          <p:cNvSpPr txBox="1"/>
+          <p:nvPr/>
+        </p:nvSpPr>
+        <p:spPr>
+          <a:xfrm>
+            <a:off x="6858000" y="1965960"/>
+            <a:ext cx="2103120" cy="365760"/>
+          </a:xfrm>
+          <a:prstGeom prst="rect">
+            <a:avLst/>
+          </a:prstGeom>
+          <a:noFill/>
+        </p:spPr>
+        <p:txBody>
+          <a:bodyPr wrap="none">
+            <a:spAutoFit/>
+          </a:bodyPr>
+          <a:lstStyle/>
+          <a:p>
+            <a:pPr algn="ctr">
+              <a:spcAft>
+                <a:spcPts val="400"/>
+              </a:spcAft>
+              <a:defRPr sz="900" b="0">
+                <a:solidFill>
+                  <a:srgbClr val="2C3E50"/>
+                </a:solidFill>
+                <a:latin typeface="Microsoft YaHei"/>
+              </a:defRPr>
+            </a:pPr>
+            <a:r>
+              <a:t>冻干目标投运</a:t>
+            </a:r>
+          </a:p>
+        </p:txBody>
+      </p:sp>
+      <p:sp>
+        <p:nvSpPr>
+          <p:cNvPr id="17" name="Rectangle 16"/>
+          <p:cNvSpPr/>
+          <p:nvPr/>
+        </p:nvSpPr>
+        <p:spPr>
+          <a:xfrm>
+            <a:off x="274320" y="2468880"/>
+            <a:ext cx="2103120" cy="320040"/>
+          </a:xfrm>
+          <a:prstGeom prst="rect">
+            <a:avLst/>
+          </a:prstGeom>
+          <a:solidFill>
+            <a:srgbClr val="00366A"/>
+          </a:solidFill>
+          <a:ln>
+            <a:noFill/>
+          </a:ln>
+        </p:spPr>
+        <p:style>
+          <a:lnRef idx="1">
+            <a:schemeClr val="accent1"/>
+          </a:lnRef>
+          <a:fillRef idx="3">
+            <a:schemeClr val="accent1"/>
+          </a:fillRef>
+          <a:effectRef idx="2">
+            <a:schemeClr val="accent1"/>
+          </a:effectRef>
+          <a:fontRef idx="minor">
+            <a:schemeClr val="lt1"/>
+          </a:fontRef>
+        </p:style>
+        <p:txBody>
+          <a:bodyPr rtlCol="0" anchor="ctr"/>
+          <a:lstStyle/>
+          <a:p>
+            <a:pPr algn="ctr"/>
+          </a:p>
+        </p:txBody>
+      </p:sp>
+      <p:sp>
+        <p:nvSpPr>
+          <p:cNvPr id="18" name="TextBox 17"/>
+          <p:cNvSpPr txBox="1"/>
+          <p:nvPr/>
+        </p:nvSpPr>
+        <p:spPr>
+          <a:xfrm>
+            <a:off x="320040" y="2487168"/>
+            <a:ext cx="2011680" cy="320040"/>
+          </a:xfrm>
+          <a:prstGeom prst="rect">
+            <a:avLst/>
+          </a:prstGeom>
+          <a:noFill/>
+        </p:spPr>
+        <p:txBody>
+          <a:bodyPr wrap="none">
+            <a:spAutoFit/>
+          </a:bodyPr>
+          <a:lstStyle/>
+          <a:p>
+            <a:pPr algn="l">
+              <a:spcAft>
+                <a:spcPts val="400"/>
+              </a:spcAft>
+              <a:defRPr sz="1040" b="1">
+                <a:solidFill>
+                  <a:srgbClr val="FFFFFF"/>
+                </a:solidFill>
+                <a:latin typeface="Microsoft YaHei"/>
+              </a:defRPr>
+            </a:pPr>
+            <a:r>
+              <a:t>① 可行性闭环</a:t>
+            </a:r>
+          </a:p>
+        </p:txBody>
+      </p:sp>
+      <p:sp>
+        <p:nvSpPr>
+          <p:cNvPr id="19" name="Rectangle 18"/>
+          <p:cNvSpPr/>
+          <p:nvPr/>
+        </p:nvSpPr>
+        <p:spPr>
+          <a:xfrm>
+            <a:off x="274320" y="2788920"/>
+            <a:ext cx="2103120" cy="1965960"/>
+          </a:xfrm>
+          <a:prstGeom prst="rect">
+            <a:avLst/>
+          </a:prstGeom>
+          <a:solidFill>
+            <a:srgbClr val="FFFFFF"/>
+          </a:solidFill>
+          <a:ln>
+            <a:solidFill>
+              <a:srgbClr val="D4DDE6"/>
+            </a:solidFill>
+          </a:ln>
+        </p:spPr>
+        <p:style>
+          <a:lnRef idx="1">
+            <a:schemeClr val="accent1"/>
+          </a:lnRef>
+          <a:fillRef idx="3">
+            <a:schemeClr val="accent1"/>
+          </a:fillRef>
+          <a:effectRef idx="2">
+            <a:schemeClr val="accent1"/>
+          </a:effectRef>
+          <a:fontRef idx="minor">
+            <a:schemeClr val="lt1"/>
+          </a:fontRef>
+        </p:style>
+        <p:txBody>
+          <a:bodyPr rtlCol="0" anchor="ctr"/>
+          <a:lstStyle/>
+          <a:p>
+            <a:pPr algn="ctr"/>
+          </a:p>
+        </p:txBody>
+      </p:sp>
+      <p:sp>
+        <p:nvSpPr>
+          <p:cNvPr id="20" name="TextBox 19"/>
+          <p:cNvSpPr txBox="1"/>
+          <p:nvPr/>
+        </p:nvSpPr>
+        <p:spPr>
+          <a:xfrm>
+            <a:off x="347472" y="2834640"/>
+            <a:ext cx="1956816" cy="1874520"/>
+          </a:xfrm>
+          <a:prstGeom prst="rect">
+            <a:avLst/>
+          </a:prstGeom>
+          <a:noFill/>
+        </p:spPr>
+        <p:txBody>
+          <a:bodyPr wrap="square" anchor="t">
+            <a:spAutoFit/>
+          </a:bodyPr>
+          <a:lstStyle/>
+          <a:p>
+            <a:pPr>
+              <a:spcAft>
+                <a:spcPts val="500"/>
+              </a:spcAft>
+              <a:defRPr sz="850">
+                <a:solidFill>
+                  <a:srgbClr val="0F2B46"/>
+                </a:solidFill>
+                <a:latin typeface="Microsoft YaHei"/>
+              </a:defRPr>
+            </a:pPr>
+            <a:r>
+              <a:t>• 全程跟进英国侧 FS 讲解及多轮专题会</a:t>
+            </a:r>
+          </a:p>
+          <a:p>
+            <a:pPr>
+              <a:spcAft>
+                <a:spcPts val="500"/>
+              </a:spcAft>
+              <a:defRPr sz="850">
+                <a:solidFill>
+                  <a:srgbClr val="0F2B46"/>
+                </a:solidFill>
+                <a:latin typeface="Microsoft YaHei"/>
+              </a:defRPr>
+            </a:pPr>
+            <a:r>
+              <a:t>• 方案布局与投资口径中英方一致理解</a:t>
+            </a:r>
+          </a:p>
+          <a:p>
+            <a:pPr>
+              <a:spcAft>
+                <a:spcPts val="500"/>
+              </a:spcAft>
+              <a:defRPr sz="850">
+                <a:solidFill>
+                  <a:srgbClr val="0F2B46"/>
+                </a:solidFill>
+                <a:latin typeface="Microsoft YaHei"/>
+              </a:defRPr>
+            </a:pPr>
+            <a:r>
+              <a:t>• 可行性结论及投资框架已明确</a:t>
+            </a:r>
+          </a:p>
+        </p:txBody>
+      </p:sp>
+      <p:sp>
+        <p:nvSpPr>
+          <p:cNvPr id="21" name="Rectangle 20"/>
+          <p:cNvSpPr/>
+          <p:nvPr/>
+        </p:nvSpPr>
+        <p:spPr>
+          <a:xfrm>
+            <a:off x="2468880" y="2468880"/>
+            <a:ext cx="2103120" cy="320040"/>
+          </a:xfrm>
+          <a:prstGeom prst="rect">
+            <a:avLst/>
+          </a:prstGeom>
+          <a:solidFill>
+            <a:srgbClr val="00366A"/>
+          </a:solidFill>
+          <a:ln>
+            <a:noFill/>
+          </a:ln>
+        </p:spPr>
+        <p:style>
+          <a:lnRef idx="1">
+            <a:schemeClr val="accent1"/>
+          </a:lnRef>
+          <a:fillRef idx="3">
+            <a:schemeClr val="accent1"/>
+          </a:fillRef>
+          <a:effectRef idx="2">
+            <a:schemeClr val="accent1"/>
+          </a:effectRef>
+          <a:fontRef idx="minor">
+            <a:schemeClr val="lt1"/>
+          </a:fontRef>
+        </p:style>
+        <p:txBody>
+          <a:bodyPr rtlCol="0" anchor="ctr"/>
+          <a:lstStyle/>
+          <a:p>
+            <a:pPr algn="ctr"/>
+          </a:p>
+        </p:txBody>
+      </p:sp>
+      <p:sp>
+        <p:nvSpPr>
+          <p:cNvPr id="22" name="TextBox 21"/>
+          <p:cNvSpPr txBox="1"/>
+          <p:nvPr/>
+        </p:nvSpPr>
+        <p:spPr>
+          <a:xfrm>
+            <a:off x="2514600" y="2487168"/>
+            <a:ext cx="2011680" cy="320040"/>
+          </a:xfrm>
+          <a:prstGeom prst="rect">
+            <a:avLst/>
+          </a:prstGeom>
+          <a:noFill/>
+        </p:spPr>
+        <p:txBody>
+          <a:bodyPr wrap="none">
+            <a:spAutoFit/>
+          </a:bodyPr>
+          <a:lstStyle/>
+          <a:p>
+            <a:pPr algn="l">
+              <a:spcAft>
+                <a:spcPts val="400"/>
+              </a:spcAft>
+              <a:defRPr sz="1040" b="1">
+                <a:solidFill>
+                  <a:srgbClr val="FFFFFF"/>
+                </a:solidFill>
+                <a:latin typeface="Microsoft YaHei"/>
+              </a:defRPr>
+            </a:pPr>
+            <a:r>
+              <a:t>② 投资与汇报</a:t>
+            </a:r>
+          </a:p>
+        </p:txBody>
+      </p:sp>
+      <p:sp>
+        <p:nvSpPr>
+          <p:cNvPr id="23" name="Rectangle 22"/>
+          <p:cNvSpPr/>
+          <p:nvPr/>
+        </p:nvSpPr>
+        <p:spPr>
+          <a:xfrm>
+            <a:off x="2468880" y="2788920"/>
+            <a:ext cx="2103120" cy="1965960"/>
+          </a:xfrm>
+          <a:prstGeom prst="rect">
+            <a:avLst/>
+          </a:prstGeom>
+          <a:solidFill>
+            <a:srgbClr val="FFFFFF"/>
+          </a:solidFill>
+          <a:ln>
+            <a:solidFill>
+              <a:srgbClr val="D4DDE6"/>
+            </a:solidFill>
+          </a:ln>
+        </p:spPr>
+        <p:style>
+          <a:lnRef idx="1">
+            <a:schemeClr val="accent1"/>
+          </a:lnRef>
+          <a:fillRef idx="3">
+            <a:schemeClr val="accent1"/>
+          </a:fillRef>
+          <a:effectRef idx="2">
+            <a:schemeClr val="accent1"/>
+          </a:effectRef>
+          <a:fontRef idx="minor">
+            <a:schemeClr val="lt1"/>
+          </a:fontRef>
+        </p:style>
+        <p:txBody>
+          <a:bodyPr rtlCol="0" anchor="ctr"/>
+          <a:lstStyle/>
+          <a:p>
+            <a:pPr algn="ctr"/>
+          </a:p>
+        </p:txBody>
+      </p:sp>
+      <p:sp>
+        <p:nvSpPr>
+          <p:cNvPr id="24" name="TextBox 23"/>
+          <p:cNvSpPr txBox="1"/>
+          <p:nvPr/>
+        </p:nvSpPr>
+        <p:spPr>
+          <a:xfrm>
+            <a:off x="2542032" y="2834640"/>
+            <a:ext cx="1956816" cy="1874520"/>
+          </a:xfrm>
+          <a:prstGeom prst="rect">
+            <a:avLst/>
+          </a:prstGeom>
+          <a:noFill/>
+        </p:spPr>
+        <p:txBody>
+          <a:bodyPr wrap="square" anchor="t">
+            <a:spAutoFit/>
+          </a:bodyPr>
+          <a:lstStyle/>
+          <a:p>
+            <a:pPr>
+              <a:spcAft>
+                <a:spcPts val="500"/>
+              </a:spcAft>
+              <a:defRPr sz="850">
+                <a:solidFill>
+                  <a:srgbClr val="0F2B46"/>
+                </a:solidFill>
+                <a:latin typeface="Microsoft YaHei"/>
+              </a:defRPr>
+            </a:pPr>
+            <a:r>
+              <a:t>• 汇总投资与进度，编制多版组合汇报材料</a:t>
+            </a:r>
+          </a:p>
+          <a:p>
+            <a:pPr>
+              <a:spcAft>
+                <a:spcPts val="500"/>
+              </a:spcAft>
+              <a:defRPr sz="850">
+                <a:solidFill>
+                  <a:srgbClr val="0F2B46"/>
+                </a:solidFill>
+                <a:latin typeface="Microsoft YaHei"/>
+              </a:defRPr>
+            </a:pPr>
+            <a:r>
+              <a:t>• 支撑管理层决策与下阶段沟通</a:t>
+            </a:r>
+          </a:p>
+          <a:p>
+            <a:pPr>
+              <a:spcAft>
+                <a:spcPts val="500"/>
+              </a:spcAft>
+              <a:defRPr sz="850">
+                <a:solidFill>
+                  <a:srgbClr val="0F2B46"/>
+                </a:solidFill>
+                <a:latin typeface="Microsoft YaHei"/>
+              </a:defRPr>
+            </a:pPr>
+            <a:r>
+              <a:t>• OOM 基础 £3.78M + 风险预备费块</a:t>
+            </a:r>
+          </a:p>
+        </p:txBody>
+      </p:sp>
+      <p:sp>
+        <p:nvSpPr>
+          <p:cNvPr id="25" name="Rectangle 24"/>
+          <p:cNvSpPr/>
+          <p:nvPr/>
+        </p:nvSpPr>
+        <p:spPr>
+          <a:xfrm>
+            <a:off x="4663440" y="2468880"/>
+            <a:ext cx="2103120" cy="320040"/>
+          </a:xfrm>
+          <a:prstGeom prst="rect">
+            <a:avLst/>
+          </a:prstGeom>
+          <a:solidFill>
+            <a:srgbClr val="00366A"/>
+          </a:solidFill>
+          <a:ln>
+            <a:noFill/>
+          </a:ln>
+        </p:spPr>
+        <p:style>
+          <a:lnRef idx="1">
+            <a:schemeClr val="accent1"/>
+          </a:lnRef>
+          <a:fillRef idx="3">
+            <a:schemeClr val="accent1"/>
+          </a:fillRef>
+          <a:effectRef idx="2">
+            <a:schemeClr val="accent1"/>
+          </a:effectRef>
+          <a:fontRef idx="minor">
+            <a:schemeClr val="lt1"/>
+          </a:fontRef>
+        </p:style>
+        <p:txBody>
+          <a:bodyPr rtlCol="0" anchor="ctr"/>
+          <a:lstStyle/>
+          <a:p>
+            <a:pPr algn="ctr"/>
+          </a:p>
+        </p:txBody>
+      </p:sp>
+      <p:sp>
+        <p:nvSpPr>
+          <p:cNvPr id="26" name="TextBox 25"/>
+          <p:cNvSpPr txBox="1"/>
+          <p:nvPr/>
+        </p:nvSpPr>
+        <p:spPr>
+          <a:xfrm>
+            <a:off x="4709160" y="2487168"/>
+            <a:ext cx="2011680" cy="320040"/>
+          </a:xfrm>
+          <a:prstGeom prst="rect">
+            <a:avLst/>
+          </a:prstGeom>
+          <a:noFill/>
+        </p:spPr>
+        <p:txBody>
+          <a:bodyPr wrap="none">
+            <a:spAutoFit/>
+          </a:bodyPr>
+          <a:lstStyle/>
+          <a:p>
+            <a:pPr algn="l">
+              <a:spcAft>
+                <a:spcPts val="400"/>
+              </a:spcAft>
+              <a:defRPr sz="1040" b="1">
+                <a:solidFill>
+                  <a:srgbClr val="FFFFFF"/>
+                </a:solidFill>
+                <a:latin typeface="Microsoft YaHei"/>
+              </a:defRPr>
+            </a:pPr>
+            <a:r>
+              <a:t>③ 接口统筹</a:t>
+            </a:r>
+          </a:p>
+        </p:txBody>
+      </p:sp>
+      <p:sp>
+        <p:nvSpPr>
+          <p:cNvPr id="27" name="Rectangle 26"/>
+          <p:cNvSpPr/>
+          <p:nvPr/>
+        </p:nvSpPr>
+        <p:spPr>
+          <a:xfrm>
+            <a:off x="4663440" y="2788920"/>
+            <a:ext cx="2103120" cy="1965960"/>
+          </a:xfrm>
+          <a:prstGeom prst="rect">
+            <a:avLst/>
+          </a:prstGeom>
+          <a:solidFill>
+            <a:srgbClr val="FFFFFF"/>
+          </a:solidFill>
+          <a:ln>
+            <a:solidFill>
+              <a:srgbClr val="D4DDE6"/>
+            </a:solidFill>
+          </a:ln>
+        </p:spPr>
+        <p:style>
+          <a:lnRef idx="1">
+            <a:schemeClr val="accent1"/>
+          </a:lnRef>
+          <a:fillRef idx="3">
+            <a:schemeClr val="accent1"/>
+          </a:fillRef>
+          <a:effectRef idx="2">
+            <a:schemeClr val="accent1"/>
+          </a:effectRef>
+          <a:fontRef idx="minor">
+            <a:schemeClr val="lt1"/>
+          </a:fontRef>
+        </p:style>
+        <p:txBody>
+          <a:bodyPr rtlCol="0" anchor="ctr"/>
+          <a:lstStyle/>
+          <a:p>
+            <a:pPr algn="ctr"/>
+          </a:p>
+        </p:txBody>
+      </p:sp>
+      <p:sp>
+        <p:nvSpPr>
+          <p:cNvPr id="28" name="TextBox 27"/>
+          <p:cNvSpPr txBox="1"/>
+          <p:nvPr/>
+        </p:nvSpPr>
+        <p:spPr>
+          <a:xfrm>
+            <a:off x="4736592" y="2834640"/>
+            <a:ext cx="1956816" cy="1874520"/>
+          </a:xfrm>
+          <a:prstGeom prst="rect">
+            <a:avLst/>
+          </a:prstGeom>
+          <a:noFill/>
+        </p:spPr>
+        <p:txBody>
+          <a:bodyPr wrap="square" anchor="t">
+            <a:spAutoFit/>
+          </a:bodyPr>
+          <a:lstStyle/>
+          <a:p>
+            <a:pPr>
+              <a:spcAft>
+                <a:spcPts val="500"/>
+              </a:spcAft>
+              <a:defRPr sz="850">
+                <a:solidFill>
+                  <a:srgbClr val="0F2B46"/>
+                </a:solidFill>
+                <a:latin typeface="Microsoft YaHei"/>
+              </a:defRPr>
+            </a:pPr>
+            <a:r>
+              <a:t>• 统筹色谱冻干与 C1 五级密闭升级</a:t>
+            </a:r>
+          </a:p>
+          <a:p>
+            <a:pPr>
+              <a:spcAft>
+                <a:spcPts val="500"/>
+              </a:spcAft>
+              <a:defRPr sz="850">
+                <a:solidFill>
+                  <a:srgbClr val="0F2B46"/>
+                </a:solidFill>
+                <a:latin typeface="Microsoft YaHei"/>
+              </a:defRPr>
+            </a:pPr>
+            <a:r>
+              <a:t>• 衔接高活实验室等配套事项</a:t>
+            </a:r>
+          </a:p>
+          <a:p>
+            <a:pPr>
+              <a:spcAft>
+                <a:spcPts val="500"/>
+              </a:spcAft>
+              <a:defRPr sz="850">
+                <a:solidFill>
+                  <a:srgbClr val="0F2B46"/>
+                </a:solidFill>
+                <a:latin typeface="Microsoft YaHei"/>
+              </a:defRPr>
+            </a:pPr>
+            <a:r>
+              <a:t>• 避免各子项割裂推进</a:t>
+            </a:r>
+          </a:p>
+        </p:txBody>
+      </p:sp>
+      <p:sp>
+        <p:nvSpPr>
+          <p:cNvPr id="29" name="Rectangle 28"/>
+          <p:cNvSpPr/>
+          <p:nvPr/>
+        </p:nvSpPr>
+        <p:spPr>
+          <a:xfrm>
+            <a:off x="6858000" y="2468880"/>
+            <a:ext cx="2103120" cy="320040"/>
+          </a:xfrm>
+          <a:prstGeom prst="rect">
+            <a:avLst/>
+          </a:prstGeom>
+          <a:solidFill>
+            <a:srgbClr val="00366A"/>
+          </a:solidFill>
+          <a:ln>
+            <a:noFill/>
+          </a:ln>
+        </p:spPr>
+        <p:style>
+          <a:lnRef idx="1">
+            <a:schemeClr val="accent1"/>
+          </a:lnRef>
+          <a:fillRef idx="3">
+            <a:schemeClr val="accent1"/>
+          </a:fillRef>
+          <a:effectRef idx="2">
+            <a:schemeClr val="accent1"/>
+          </a:effectRef>
+          <a:fontRef idx="minor">
+            <a:schemeClr val="lt1"/>
+          </a:fontRef>
+        </p:style>
+        <p:txBody>
+          <a:bodyPr rtlCol="0" anchor="ctr"/>
+          <a:lstStyle/>
+          <a:p>
+            <a:pPr algn="ctr"/>
+          </a:p>
+        </p:txBody>
+      </p:sp>
+      <p:sp>
+        <p:nvSpPr>
+          <p:cNvPr id="30" name="TextBox 29"/>
+          <p:cNvSpPr txBox="1"/>
+          <p:nvPr/>
+        </p:nvSpPr>
+        <p:spPr>
+          <a:xfrm>
+            <a:off x="6903720" y="2487168"/>
+            <a:ext cx="2011680" cy="320040"/>
+          </a:xfrm>
+          <a:prstGeom prst="rect">
+            <a:avLst/>
+          </a:prstGeom>
+          <a:noFill/>
+        </p:spPr>
+        <p:txBody>
+          <a:bodyPr wrap="none">
+            <a:spAutoFit/>
+          </a:bodyPr>
+          <a:lstStyle/>
+          <a:p>
+            <a:pPr algn="l">
+              <a:spcAft>
+                <a:spcPts val="400"/>
+              </a:spcAft>
+              <a:defRPr sz="1040" b="1">
+                <a:solidFill>
+                  <a:srgbClr val="FFFFFF"/>
+                </a:solidFill>
+                <a:latin typeface="Microsoft YaHei"/>
+              </a:defRPr>
+            </a:pPr>
+            <a:r>
+              <a:t>④ 下半年重点</a:t>
+            </a:r>
+          </a:p>
+        </p:txBody>
+      </p:sp>
+      <p:sp>
+        <p:nvSpPr>
+          <p:cNvPr id="31" name="Rectangle 30"/>
+          <p:cNvSpPr/>
+          <p:nvPr/>
+        </p:nvSpPr>
+        <p:spPr>
+          <a:xfrm>
+            <a:off x="6858000" y="2788920"/>
+            <a:ext cx="2103120" cy="1965960"/>
+          </a:xfrm>
+          <a:prstGeom prst="rect">
+            <a:avLst/>
+          </a:prstGeom>
+          <a:solidFill>
+            <a:srgbClr val="FFFFFF"/>
+          </a:solidFill>
+          <a:ln>
+            <a:solidFill>
+              <a:srgbClr val="D4DDE6"/>
+            </a:solidFill>
+          </a:ln>
+        </p:spPr>
+        <p:style>
+          <a:lnRef idx="1">
+            <a:schemeClr val="accent1"/>
+          </a:lnRef>
+          <a:fillRef idx="3">
+            <a:schemeClr val="accent1"/>
+          </a:fillRef>
+          <a:effectRef idx="2">
+            <a:schemeClr val="accent1"/>
+          </a:effectRef>
+          <a:fontRef idx="minor">
+            <a:schemeClr val="lt1"/>
+          </a:fontRef>
+        </p:style>
+        <p:txBody>
+          <a:bodyPr rtlCol="0" anchor="ctr"/>
+          <a:lstStyle/>
+          <a:p>
+            <a:pPr algn="ctr"/>
+          </a:p>
+        </p:txBody>
+      </p:sp>
+      <p:sp>
+        <p:nvSpPr>
+          <p:cNvPr id="32" name="TextBox 31"/>
+          <p:cNvSpPr txBox="1"/>
+          <p:nvPr/>
+        </p:nvSpPr>
+        <p:spPr>
+          <a:xfrm>
+            <a:off x="6931152" y="2834640"/>
+            <a:ext cx="1956816" cy="1874520"/>
+          </a:xfrm>
+          <a:prstGeom prst="rect">
+            <a:avLst/>
+          </a:prstGeom>
+          <a:noFill/>
+        </p:spPr>
+        <p:txBody>
+          <a:bodyPr wrap="square" anchor="t">
+            <a:spAutoFit/>
+          </a:bodyPr>
+          <a:lstStyle/>
+          <a:p>
+            <a:pPr>
+              <a:spcAft>
+                <a:spcPts val="500"/>
+              </a:spcAft>
+              <a:defRPr sz="850">
+                <a:solidFill>
+                  <a:srgbClr val="0F2B46"/>
+                </a:solidFill>
+                <a:latin typeface="Microsoft YaHei"/>
+              </a:defRPr>
+            </a:pPr>
+            <a:r>
+              <a:t>• 推动 FEED 启动与详设准备</a:t>
+            </a:r>
+          </a:p>
+          <a:p>
+            <a:pPr>
+              <a:spcAft>
+                <a:spcPts val="500"/>
+              </a:spcAft>
+              <a:defRPr sz="850">
+                <a:solidFill>
+                  <a:srgbClr val="0F2B46"/>
+                </a:solidFill>
+                <a:latin typeface="Microsoft YaHei"/>
+              </a:defRPr>
+            </a:pPr>
+            <a:r>
+              <a:t>• 长周期设备（冻干）采购决策</a:t>
+            </a:r>
+          </a:p>
+          <a:p>
+            <a:pPr>
+              <a:spcAft>
+                <a:spcPts val="500"/>
+              </a:spcAft>
+              <a:defRPr sz="850">
+                <a:solidFill>
+                  <a:srgbClr val="0F2B46"/>
+                </a:solidFill>
+                <a:latin typeface="Microsoft YaHei"/>
+              </a:defRPr>
+            </a:pPr>
+            <a:r>
+              <a:t>• 中外需求最终确认与常规沟通机制</a:t>
+            </a:r>
+          </a:p>
+        </p:txBody>
+      </p:sp>
+      <p:sp>
+        <p:nvSpPr>
+          <p:cNvPr id="33" name="TextBox 32"/>
+          <p:cNvSpPr txBox="1"/>
+          <p:nvPr/>
+        </p:nvSpPr>
+        <p:spPr>
+          <a:xfrm>
+            <a:off x="274320" y="4892040"/>
+            <a:ext cx="2103120" cy="182880"/>
+          </a:xfrm>
+          <a:prstGeom prst="rect">
+            <a:avLst/>
+          </a:prstGeom>
+          <a:noFill/>
+        </p:spPr>
+        <p:txBody>
+          <a:bodyPr wrap="none">
+            <a:spAutoFit/>
+          </a:bodyPr>
+          <a:lstStyle/>
+          <a:p>
+            <a:pPr algn="l">
+              <a:spcAft>
+                <a:spcPts val="400"/>
+              </a:spcAft>
+              <a:defRPr sz="700" b="0">
+                <a:solidFill>
+                  <a:srgbClr val="2C3E50"/>
+                </a:solidFill>
+                <a:latin typeface="Microsoft YaHei"/>
+              </a:defRPr>
+            </a:pPr>
+            <a:r>
+              <a:t>www.asymchem.com.cn</a:t>
+            </a:r>
+          </a:p>
+        </p:txBody>
+      </p:sp>
+      <p:sp>
+        <p:nvSpPr>
+          <p:cNvPr id="34" name="TextBox 33"/>
+          <p:cNvSpPr txBox="1"/>
+          <p:nvPr/>
+        </p:nvSpPr>
+        <p:spPr>
+          <a:xfrm>
+            <a:off x="2377440" y="4892040"/>
+            <a:ext cx="2286000" cy="182880"/>
+          </a:xfrm>
+          <a:prstGeom prst="rect">
+            <a:avLst/>
+          </a:prstGeom>
+          <a:noFill/>
+        </p:spPr>
+        <p:txBody>
+          <a:bodyPr wrap="none">
+            <a:spAutoFit/>
+          </a:bodyPr>
+          <a:lstStyle/>
+          <a:p>
+            <a:pPr algn="l">
+              <a:spcAft>
+                <a:spcPts val="400"/>
+              </a:spcAft>
+              <a:defRPr sz="700" b="0">
+                <a:solidFill>
+                  <a:srgbClr val="2C3E50"/>
+                </a:solidFill>
+                <a:latin typeface="Microsoft YaHei"/>
+              </a:defRPr>
+            </a:pPr>
+            <a:r>
+              <a:t>Stock Code: 002821.SZ / 6821.HK</a:t>
+            </a:r>
+          </a:p>
+        </p:txBody>
+      </p:sp>
+      <p:sp>
+        <p:nvSpPr>
+          <p:cNvPr id="35" name="TextBox 34"/>
+          <p:cNvSpPr txBox="1"/>
+          <p:nvPr/>
+        </p:nvSpPr>
+        <p:spPr>
+          <a:xfrm>
+            <a:off x="8595360" y="4892040"/>
+            <a:ext cx="457200" cy="182880"/>
+          </a:xfrm>
+          <a:prstGeom prst="rect">
+            <a:avLst/>
+          </a:prstGeom>
+          <a:noFill/>
+        </p:spPr>
+        <p:txBody>
+          <a:bodyPr wrap="none">
+            <a:spAutoFit/>
+          </a:bodyPr>
+          <a:lstStyle/>
+          <a:p>
+            <a:pPr algn="r">
+              <a:spcAft>
+                <a:spcPts val="400"/>
+              </a:spcAft>
+              <a:defRPr sz="700" b="0">
+                <a:solidFill>
+                  <a:srgbClr val="2C3E50"/>
+                </a:solidFill>
+                <a:latin typeface="Microsoft YaHei"/>
+              </a:defRPr>
+            </a:pPr>
+            <a:r>
+              <a:t>8</a:t>
+            </a:r>
+          </a:p>
+        </p:txBody>
+      </p:sp>
+    </p:spTree>
+  </p:cSld>
+  <p:clrMapOvr>
+    <a:masterClrMapping/>
+  </p:clrMapOvr>
+</p:sld>
+</file>
+
+<file path=ppt/slides/slide15.xml><?xml version="1.0" encoding="utf-8"?>
+<p:sld xmlns:a="http://schemas.openxmlformats.org/drawingml/2006/main" xmlns:p="http://schemas.openxmlformats.org/presentationml/2006/main" xmlns:r="http://schemas.openxmlformats.org/officeDocument/2006/relationships">
+  <p:cSld>
+    <p:spTree>
+      <p:nvGrpSpPr>
+        <p:cNvPr id="1" name=""/>
+        <p:cNvGrpSpPr/>
+        <p:nvPr/>
+      </p:nvGrpSpPr>
+      <p:grpSpPr/>
+      <p:sp>
+        <p:nvSpPr>
+          <p:cNvPr id="2" name="TextBox 1"/>
+          <p:cNvSpPr txBox="1"/>
+          <p:nvPr/>
+        </p:nvSpPr>
+        <p:spPr>
+          <a:xfrm>
+            <a:off x="3200400" y="182880"/>
+            <a:ext cx="5760720" cy="457200"/>
+          </a:xfrm>
+          <a:prstGeom prst="rect">
+            <a:avLst/>
+          </a:prstGeom>
+          <a:noFill/>
+        </p:spPr>
+        <p:txBody>
+          <a:bodyPr wrap="none">
+            <a:spAutoFit/>
+          </a:bodyPr>
+          <a:lstStyle/>
+          <a:p>
+            <a:pPr algn="l">
+              <a:spcAft>
+                <a:spcPts val="400"/>
+              </a:spcAft>
+              <a:defRPr sz="2000" b="1">
+                <a:solidFill>
+                  <a:srgbClr val="00366A"/>
+                </a:solidFill>
+                <a:latin typeface="Microsoft YaHei"/>
+              </a:defRPr>
+            </a:pPr>
+            <a:r>
+              <a:t>制备色谱 &amp; 冻干机改造 · 投资结构与周期</a:t>
+            </a:r>
+          </a:p>
+        </p:txBody>
+      </p:sp>
+      <p:sp>
+        <p:nvSpPr>
+          <p:cNvPr id="3" name="Rectangle 2"/>
+          <p:cNvSpPr/>
+          <p:nvPr/>
+        </p:nvSpPr>
+        <p:spPr>
+          <a:xfrm>
+            <a:off x="274320" y="777240"/>
+            <a:ext cx="8595360" cy="27432"/>
+          </a:xfrm>
+          <a:prstGeom prst="rect">
+            <a:avLst/>
+          </a:prstGeom>
+          <a:solidFill>
+            <a:srgbClr val="FF7E3D"/>
+          </a:solidFill>
+          <a:ln>
+            <a:noFill/>
+          </a:ln>
+        </p:spPr>
+        <p:style>
+          <a:lnRef idx="1">
+            <a:schemeClr val="accent1"/>
+          </a:lnRef>
+          <a:fillRef idx="3">
+            <a:schemeClr val="accent1"/>
+          </a:fillRef>
+          <a:effectRef idx="2">
+            <a:schemeClr val="accent1"/>
+          </a:effectRef>
+          <a:fontRef idx="minor">
+            <a:schemeClr val="lt1"/>
+          </a:fontRef>
+        </p:style>
+        <p:txBody>
+          <a:bodyPr rtlCol="0" anchor="ctr"/>
+          <a:lstStyle/>
+          <a:p>
+            <a:pPr algn="ctr"/>
+          </a:p>
+        </p:txBody>
+      </p:sp>
+      <p:sp>
+        <p:nvSpPr>
+          <p:cNvPr id="4" name="TextBox 3"/>
+          <p:cNvSpPr txBox="1"/>
+          <p:nvPr/>
+        </p:nvSpPr>
+        <p:spPr>
+          <a:xfrm>
+            <a:off x="274320" y="914400"/>
+            <a:ext cx="8595360" cy="329184"/>
+          </a:xfrm>
+          <a:prstGeom prst="rect">
+            <a:avLst/>
+          </a:prstGeom>
+          <a:noFill/>
+        </p:spPr>
+        <p:txBody>
+          <a:bodyPr wrap="none">
+            <a:spAutoFit/>
+          </a:bodyPr>
+          <a:lstStyle/>
+          <a:p>
+            <a:pPr algn="l">
+              <a:spcAft>
+                <a:spcPts val="400"/>
+              </a:spcAft>
+              <a:defRPr sz="950" b="0">
+                <a:solidFill>
+                  <a:srgbClr val="2C3E50"/>
+                </a:solidFill>
+                <a:latin typeface="Microsoft YaHei"/>
+              </a:defRPr>
+            </a:pPr>
+            <a:r>
+              <a:t>范围：DAC300/CP300 制备色谱 + 冻干机（隔离器、除湿、PSG）及厂房改造 · RB Plant 9802</a:t>
+            </a:r>
+          </a:p>
+        </p:txBody>
+      </p:sp>
+      <p:pic>
+        <p:nvPicPr>
+          <p:cNvPr id="5" name="Picture 4" descr="hplc_capex.png"/>
+          <p:cNvPicPr>
+            <a:picLocks noChangeAspect="1"/>
+          </p:cNvPicPr>
+          <p:nvPr/>
+        </p:nvPicPr>
+        <p:blipFill>
+          <a:blip r:embed="rId2"/>
+          <a:stretch>
+            <a:fillRect/>
+          </a:stretch>
+        </p:blipFill>
+        <p:spPr>
+          <a:xfrm>
+            <a:off x="274320" y="1325880"/>
+            <a:ext cx="4160520" cy="3246120"/>
+          </a:xfrm>
+          <a:prstGeom prst="rect">
+            <a:avLst/>
+          </a:prstGeom>
+        </p:spPr>
+      </p:pic>
+      <p:pic>
+        <p:nvPicPr>
+          <p:cNvPr id="6" name="Picture 5" descr="hplc_gantt.png"/>
+          <p:cNvPicPr>
+            <a:picLocks noChangeAspect="1"/>
+          </p:cNvPicPr>
+          <p:nvPr/>
+        </p:nvPicPr>
+        <p:blipFill>
+          <a:blip r:embed="rId3"/>
+          <a:stretch>
+            <a:fillRect/>
+          </a:stretch>
+        </p:blipFill>
+        <p:spPr>
+          <a:xfrm>
+            <a:off x="4572000" y="1325880"/>
+            <a:ext cx="4297680" cy="3246120"/>
+          </a:xfrm>
+          <a:prstGeom prst="rect">
+            <a:avLst/>
+          </a:prstGeom>
+        </p:spPr>
+      </p:pic>
+      <p:sp>
+        <p:nvSpPr>
+          <p:cNvPr id="7" name="Rounded Rectangle 6"/>
+          <p:cNvSpPr/>
+          <p:nvPr/>
+        </p:nvSpPr>
+        <p:spPr>
+          <a:xfrm>
+            <a:off x="274320" y="4617720"/>
+            <a:ext cx="2057400" cy="502920"/>
+          </a:xfrm>
+          <a:prstGeom prst="roundRect">
+            <a:avLst/>
+          </a:prstGeom>
+          <a:solidFill>
+            <a:srgbClr val="E7EEFB"/>
+          </a:solidFill>
+          <a:ln>
+            <a:solidFill>
+              <a:srgbClr val="5B6EAE"/>
+            </a:solidFill>
+          </a:ln>
+        </p:spPr>
+        <p:style>
+          <a:lnRef idx="1">
+            <a:schemeClr val="accent1"/>
+          </a:lnRef>
+          <a:fillRef idx="3">
+            <a:schemeClr val="accent1"/>
+          </a:fillRef>
+          <a:effectRef idx="2">
+            <a:schemeClr val="accent1"/>
+          </a:effectRef>
+          <a:fontRef idx="minor">
+            <a:schemeClr val="lt1"/>
+          </a:fontRef>
+        </p:style>
+        <p:txBody>
+          <a:bodyPr rtlCol="0" anchor="ctr"/>
+          <a:lstStyle/>
+          <a:p>
+            <a:pPr algn="ctr"/>
+          </a:p>
+        </p:txBody>
+      </p:sp>
+      <p:sp>
+        <p:nvSpPr>
+          <p:cNvPr id="8" name="TextBox 7"/>
+          <p:cNvSpPr txBox="1"/>
+          <p:nvPr/>
+        </p:nvSpPr>
+        <p:spPr>
+          <a:xfrm>
+            <a:off x="365760" y="4645152"/>
+            <a:ext cx="1874519" cy="457200"/>
+          </a:xfrm>
+          <a:prstGeom prst="rect">
+            <a:avLst/>
+          </a:prstGeom>
+          <a:noFill/>
+        </p:spPr>
+        <p:txBody>
+          <a:bodyPr wrap="none">
+            <a:spAutoFit/>
+          </a:bodyPr>
+          <a:lstStyle/>
+          <a:p>
+            <a:r>
+              <a:rPr sz="800" b="1">
+                <a:solidFill>
+                  <a:srgbClr val="00366A"/>
+                </a:solidFill>
+                <a:latin typeface="Microsoft YaHei"/>
+              </a:rPr>
+              <a:t>Q3 2026  </a:t>
+            </a:r>
+            <a:r>
+              <a:rPr sz="750" b="0">
+                <a:solidFill>
+                  <a:srgbClr val="0F2B46"/>
+                </a:solidFill>
+                <a:latin typeface="Microsoft YaHei"/>
+              </a:rPr>
+              <a:t>FEED 启动
+冻干规格/资金</a:t>
+            </a:r>
+          </a:p>
+        </p:txBody>
+      </p:sp>
+      <p:sp>
+        <p:nvSpPr>
+          <p:cNvPr id="9" name="Rounded Rectangle 8"/>
+          <p:cNvSpPr/>
+          <p:nvPr/>
+        </p:nvSpPr>
+        <p:spPr>
+          <a:xfrm>
+            <a:off x="2468880" y="4617720"/>
+            <a:ext cx="2057400" cy="502920"/>
+          </a:xfrm>
+          <a:prstGeom prst="roundRect">
+            <a:avLst/>
+          </a:prstGeom>
+          <a:solidFill>
+            <a:srgbClr val="E7EEFB"/>
+          </a:solidFill>
+          <a:ln>
+            <a:solidFill>
+              <a:srgbClr val="5B6EAE"/>
+            </a:solidFill>
+          </a:ln>
+        </p:spPr>
+        <p:style>
+          <a:lnRef idx="1">
+            <a:schemeClr val="accent1"/>
+          </a:lnRef>
+          <a:fillRef idx="3">
+            <a:schemeClr val="accent1"/>
+          </a:fillRef>
+          <a:effectRef idx="2">
+            <a:schemeClr val="accent1"/>
+          </a:effectRef>
+          <a:fontRef idx="minor">
+            <a:schemeClr val="lt1"/>
+          </a:fontRef>
+        </p:style>
+        <p:txBody>
+          <a:bodyPr rtlCol="0" anchor="ctr"/>
+          <a:lstStyle/>
+          <a:p>
+            <a:pPr algn="ctr"/>
+          </a:p>
+        </p:txBody>
+      </p:sp>
+      <p:sp>
+        <p:nvSpPr>
+          <p:cNvPr id="10" name="TextBox 9"/>
+          <p:cNvSpPr txBox="1"/>
+          <p:nvPr/>
+        </p:nvSpPr>
+        <p:spPr>
+          <a:xfrm>
+            <a:off x="2560320" y="4645152"/>
+            <a:ext cx="1874519" cy="457200"/>
+          </a:xfrm>
+          <a:prstGeom prst="rect">
+            <a:avLst/>
+          </a:prstGeom>
+          <a:noFill/>
+        </p:spPr>
+        <p:txBody>
+          <a:bodyPr wrap="none">
+            <a:spAutoFit/>
+          </a:bodyPr>
+          <a:lstStyle/>
+          <a:p>
+            <a:r>
+              <a:rPr sz="800" b="1">
+                <a:solidFill>
+                  <a:srgbClr val="00366A"/>
+                </a:solidFill>
+                <a:latin typeface="Microsoft YaHei"/>
+              </a:rPr>
+              <a:t>Q4 2026  </a:t>
+            </a:r>
+            <a:r>
+              <a:rPr sz="750" b="0">
+                <a:solidFill>
+                  <a:srgbClr val="0F2B46"/>
+                </a:solidFill>
+                <a:latin typeface="Microsoft YaHei"/>
+              </a:rPr>
+              <a:t>详设准备
+HPLC 规格/资金</a:t>
+            </a:r>
+          </a:p>
+        </p:txBody>
+      </p:sp>
+      <p:sp>
+        <p:nvSpPr>
+          <p:cNvPr id="11" name="Rounded Rectangle 10"/>
+          <p:cNvSpPr/>
+          <p:nvPr/>
+        </p:nvSpPr>
+        <p:spPr>
+          <a:xfrm>
+            <a:off x="4663440" y="4617720"/>
+            <a:ext cx="2057400" cy="502920"/>
+          </a:xfrm>
+          <a:prstGeom prst="roundRect">
+            <a:avLst/>
+          </a:prstGeom>
+          <a:solidFill>
+            <a:srgbClr val="E7EEFB"/>
+          </a:solidFill>
+          <a:ln>
+            <a:solidFill>
+              <a:srgbClr val="5B6EAE"/>
+            </a:solidFill>
+          </a:ln>
+        </p:spPr>
+        <p:style>
+          <a:lnRef idx="1">
+            <a:schemeClr val="accent1"/>
+          </a:lnRef>
+          <a:fillRef idx="3">
+            <a:schemeClr val="accent1"/>
+          </a:fillRef>
+          <a:effectRef idx="2">
+            <a:schemeClr val="accent1"/>
+          </a:effectRef>
+          <a:fontRef idx="minor">
+            <a:schemeClr val="lt1"/>
+          </a:fontRef>
+        </p:style>
+        <p:txBody>
+          <a:bodyPr rtlCol="0" anchor="ctr"/>
+          <a:lstStyle/>
+          <a:p>
+            <a:pPr algn="ctr"/>
+          </a:p>
+        </p:txBody>
+      </p:sp>
+      <p:sp>
+        <p:nvSpPr>
+          <p:cNvPr id="12" name="TextBox 11"/>
+          <p:cNvSpPr txBox="1"/>
+          <p:nvPr/>
+        </p:nvSpPr>
+        <p:spPr>
+          <a:xfrm>
+            <a:off x="4754880" y="4645152"/>
+            <a:ext cx="1874519" cy="457200"/>
+          </a:xfrm>
+          <a:prstGeom prst="rect">
+            <a:avLst/>
+          </a:prstGeom>
+          <a:noFill/>
+        </p:spPr>
+        <p:txBody>
+          <a:bodyPr wrap="none">
+            <a:spAutoFit/>
+          </a:bodyPr>
+          <a:lstStyle/>
+          <a:p>
+            <a:r>
+              <a:rPr sz="800" b="1">
+                <a:solidFill>
+                  <a:srgbClr val="00366A"/>
+                </a:solidFill>
+                <a:latin typeface="Microsoft YaHei"/>
+              </a:rPr>
+              <a:t>2027 H1  </a:t>
+            </a:r>
+            <a:r>
+              <a:rPr sz="750" b="0">
+                <a:solidFill>
+                  <a:srgbClr val="0F2B46"/>
+                </a:solidFill>
+                <a:latin typeface="Microsoft YaHei"/>
+              </a:rPr>
+              <a:t>设备 FAT
+厂房改造</a:t>
+            </a:r>
+          </a:p>
+        </p:txBody>
+      </p:sp>
+      <p:sp>
+        <p:nvSpPr>
+          <p:cNvPr id="13" name="Rounded Rectangle 12"/>
+          <p:cNvSpPr/>
+          <p:nvPr/>
+        </p:nvSpPr>
+        <p:spPr>
+          <a:xfrm>
+            <a:off x="6858000" y="4617720"/>
+            <a:ext cx="2057400" cy="502920"/>
+          </a:xfrm>
+          <a:prstGeom prst="roundRect">
+            <a:avLst/>
+          </a:prstGeom>
+          <a:solidFill>
+            <a:srgbClr val="E7EEFB"/>
+          </a:solidFill>
+          <a:ln>
+            <a:solidFill>
+              <a:srgbClr val="5B6EAE"/>
+            </a:solidFill>
+          </a:ln>
+        </p:spPr>
+        <p:style>
+          <a:lnRef idx="1">
+            <a:schemeClr val="accent1"/>
+          </a:lnRef>
+          <a:fillRef idx="3">
+            <a:schemeClr val="accent1"/>
+          </a:fillRef>
+          <a:effectRef idx="2">
+            <a:schemeClr val="accent1"/>
+          </a:effectRef>
+          <a:fontRef idx="minor">
+            <a:schemeClr val="lt1"/>
+          </a:fontRef>
+        </p:style>
+        <p:txBody>
+          <a:bodyPr rtlCol="0" anchor="ctr"/>
+          <a:lstStyle/>
+          <a:p>
+            <a:pPr algn="ctr"/>
+          </a:p>
+        </p:txBody>
+      </p:sp>
+      <p:sp>
+        <p:nvSpPr>
+          <p:cNvPr id="14" name="TextBox 13"/>
+          <p:cNvSpPr txBox="1"/>
+          <p:nvPr/>
+        </p:nvSpPr>
+        <p:spPr>
+          <a:xfrm>
+            <a:off x="6949440" y="4645152"/>
+            <a:ext cx="1874519" cy="457200"/>
+          </a:xfrm>
+          <a:prstGeom prst="rect">
+            <a:avLst/>
+          </a:prstGeom>
+          <a:noFill/>
+        </p:spPr>
+        <p:txBody>
+          <a:bodyPr wrap="none">
+            <a:spAutoFit/>
+          </a:bodyPr>
+          <a:lstStyle/>
+          <a:p>
+            <a:r>
+              <a:rPr sz="800" b="1">
+                <a:solidFill>
+                  <a:srgbClr val="00366A"/>
+                </a:solidFill>
+                <a:latin typeface="Microsoft YaHei"/>
+              </a:rPr>
+              <a:t>2027 H2  </a:t>
+            </a:r>
+            <a:r>
+              <a:rPr sz="750" b="0">
+                <a:solidFill>
+                  <a:srgbClr val="0F2B46"/>
+                </a:solidFill>
+                <a:latin typeface="Microsoft YaHei"/>
+              </a:rPr>
+              <a:t>HPLC 投运
+冻干验证</a:t>
+            </a:r>
+          </a:p>
+        </p:txBody>
+      </p:sp>
+      <p:sp>
+        <p:nvSpPr>
+          <p:cNvPr id="15" name="TextBox 14"/>
+          <p:cNvSpPr txBox="1"/>
+          <p:nvPr/>
+        </p:nvSpPr>
+        <p:spPr>
+          <a:xfrm>
+            <a:off x="274320" y="4892040"/>
+            <a:ext cx="2103120" cy="182880"/>
+          </a:xfrm>
+          <a:prstGeom prst="rect">
+            <a:avLst/>
+          </a:prstGeom>
+          <a:noFill/>
+        </p:spPr>
+        <p:txBody>
+          <a:bodyPr wrap="none">
+            <a:spAutoFit/>
+          </a:bodyPr>
+          <a:lstStyle/>
+          <a:p>
+            <a:pPr algn="l">
+              <a:spcAft>
+                <a:spcPts val="400"/>
+              </a:spcAft>
+              <a:defRPr sz="700" b="0">
+                <a:solidFill>
+                  <a:srgbClr val="2C3E50"/>
+                </a:solidFill>
+                <a:latin typeface="Microsoft YaHei"/>
+              </a:defRPr>
+            </a:pPr>
+            <a:r>
+              <a:t>www.asymchem.com.cn</a:t>
+            </a:r>
+          </a:p>
+        </p:txBody>
+      </p:sp>
+      <p:sp>
+        <p:nvSpPr>
+          <p:cNvPr id="16" name="TextBox 15"/>
+          <p:cNvSpPr txBox="1"/>
+          <p:nvPr/>
+        </p:nvSpPr>
+        <p:spPr>
+          <a:xfrm>
+            <a:off x="2377440" y="4892040"/>
+            <a:ext cx="2286000" cy="182880"/>
+          </a:xfrm>
+          <a:prstGeom prst="rect">
+            <a:avLst/>
+          </a:prstGeom>
+          <a:noFill/>
+        </p:spPr>
+        <p:txBody>
+          <a:bodyPr wrap="none">
+            <a:spAutoFit/>
+          </a:bodyPr>
+          <a:lstStyle/>
+          <a:p>
+            <a:pPr algn="l">
+              <a:spcAft>
+                <a:spcPts val="400"/>
+              </a:spcAft>
+              <a:defRPr sz="700" b="0">
+                <a:solidFill>
+                  <a:srgbClr val="2C3E50"/>
+                </a:solidFill>
+                <a:latin typeface="Microsoft YaHei"/>
+              </a:defRPr>
+            </a:pPr>
+            <a:r>
+              <a:t>Stock Code: 002821.SZ / 6821.HK</a:t>
+            </a:r>
+          </a:p>
+        </p:txBody>
+      </p:sp>
+      <p:sp>
+        <p:nvSpPr>
+          <p:cNvPr id="17" name="TextBox 16"/>
+          <p:cNvSpPr txBox="1"/>
+          <p:nvPr/>
+        </p:nvSpPr>
+        <p:spPr>
+          <a:xfrm>
+            <a:off x="8595360" y="4892040"/>
+            <a:ext cx="457200" cy="182880"/>
+          </a:xfrm>
+          <a:prstGeom prst="rect">
+            <a:avLst/>
+          </a:prstGeom>
+          <a:noFill/>
+        </p:spPr>
+        <p:txBody>
+          <a:bodyPr wrap="none">
+            <a:spAutoFit/>
+          </a:bodyPr>
+          <a:lstStyle/>
+          <a:p>
+            <a:pPr algn="r">
+              <a:spcAft>
+                <a:spcPts val="400"/>
+              </a:spcAft>
+              <a:defRPr sz="700" b="0">
+                <a:solidFill>
+                  <a:srgbClr val="2C3E50"/>
+                </a:solidFill>
+                <a:latin typeface="Microsoft YaHei"/>
+              </a:defRPr>
+            </a:pPr>
+            <a:r>
+              <a:t>9</a:t>
+            </a:r>
+          </a:p>
+        </p:txBody>
+      </p:sp>
+    </p:spTree>
+  </p:cSld>
+  <p:clrMapOvr>
+    <a:masterClrMapping/>
+  </p:clrMapOvr>
+</p:sld>
+</file>
+
+<file path=ppt/slides/slide16.xml><?xml version="1.0" encoding="utf-8"?>
+<p:sld xmlns:a="http://schemas.openxmlformats.org/drawingml/2006/main" xmlns:p="http://schemas.openxmlformats.org/presentationml/2006/main" xmlns:r="http://schemas.openxmlformats.org/officeDocument/2006/relationships">
+  <p:cSld>
+    <p:spTree>
+      <p:nvGrpSpPr>
+        <p:cNvPr id="1" name=""/>
+        <p:cNvGrpSpPr/>
+        <p:nvPr/>
+      </p:nvGrpSpPr>
+      <p:grpSpPr/>
+      <p:sp>
+        <p:nvSpPr>
+          <p:cNvPr id="2" name="TextBox 1"/>
+          <p:cNvSpPr txBox="1"/>
+          <p:nvPr/>
+        </p:nvSpPr>
+        <p:spPr>
+          <a:xfrm>
+            <a:off x="3200400" y="182880"/>
+            <a:ext cx="5760720" cy="457200"/>
+          </a:xfrm>
+          <a:prstGeom prst="rect">
+            <a:avLst/>
+          </a:prstGeom>
+          <a:noFill/>
+        </p:spPr>
+        <p:txBody>
+          <a:bodyPr wrap="none">
+            <a:spAutoFit/>
+          </a:bodyPr>
+          <a:lstStyle/>
+          <a:p>
+            <a:pPr algn="l">
+              <a:spcAft>
+                <a:spcPts val="400"/>
+              </a:spcAft>
+              <a:defRPr sz="2000" b="1">
+                <a:solidFill>
+                  <a:srgbClr val="00366A"/>
+                </a:solidFill>
+                <a:latin typeface="Microsoft YaHei"/>
+              </a:defRPr>
+            </a:pPr>
+            <a:r>
+              <a:t>902 东侧扩建 · 上半年推进主线</a:t>
+            </a:r>
+          </a:p>
+        </p:txBody>
+      </p:sp>
+      <p:sp>
+        <p:nvSpPr>
+          <p:cNvPr id="3" name="Rectangle 2"/>
+          <p:cNvSpPr/>
+          <p:nvPr/>
+        </p:nvSpPr>
+        <p:spPr>
+          <a:xfrm>
+            <a:off x="274320" y="777240"/>
+            <a:ext cx="8595360" cy="27432"/>
+          </a:xfrm>
+          <a:prstGeom prst="rect">
+            <a:avLst/>
+          </a:prstGeom>
+          <a:solidFill>
+            <a:srgbClr val="FF7E3D"/>
+          </a:solidFill>
+          <a:ln>
+            <a:noFill/>
+          </a:ln>
+        </p:spPr>
+        <p:style>
+          <a:lnRef idx="1">
+            <a:schemeClr val="accent1"/>
+          </a:lnRef>
+          <a:fillRef idx="3">
+            <a:schemeClr val="accent1"/>
+          </a:fillRef>
+          <a:effectRef idx="2">
+            <a:schemeClr val="accent1"/>
+          </a:effectRef>
+          <a:fontRef idx="minor">
+            <a:schemeClr val="lt1"/>
+          </a:fontRef>
+        </p:style>
+        <p:txBody>
+          <a:bodyPr rtlCol="0" anchor="ctr"/>
+          <a:lstStyle/>
+          <a:p>
+            <a:pPr algn="ctr"/>
+          </a:p>
+        </p:txBody>
+      </p:sp>
+      <p:sp>
+        <p:nvSpPr>
+          <p:cNvPr id="4" name="TextBox 3"/>
+          <p:cNvSpPr txBox="1"/>
+          <p:nvPr/>
+        </p:nvSpPr>
+        <p:spPr>
+          <a:xfrm>
+            <a:off x="274320" y="914400"/>
+            <a:ext cx="8595360" cy="329184"/>
+          </a:xfrm>
+          <a:prstGeom prst="rect">
+            <a:avLst/>
+          </a:prstGeom>
+          <a:noFill/>
+        </p:spPr>
+        <p:txBody>
+          <a:bodyPr wrap="none">
+            <a:spAutoFit/>
+          </a:bodyPr>
+          <a:lstStyle/>
+          <a:p>
+            <a:pPr algn="l">
+              <a:spcAft>
+                <a:spcPts val="400"/>
+              </a:spcAft>
+              <a:defRPr sz="950" b="0">
+                <a:solidFill>
+                  <a:srgbClr val="2C3E50"/>
+                </a:solidFill>
+                <a:latin typeface="Microsoft YaHei"/>
+              </a:defRPr>
+            </a:pPr>
+            <a:r>
+              <a:t>Scitech 可行性研究（RIBA 1）2026年5月完成；推荐 Option 1 方案；下半年进入概念设计</a:t>
+            </a:r>
+          </a:p>
+        </p:txBody>
+      </p:sp>
+      <p:sp>
+        <p:nvSpPr>
+          <p:cNvPr id="5" name="Rounded Rectangle 4"/>
+          <p:cNvSpPr/>
+          <p:nvPr/>
+        </p:nvSpPr>
+        <p:spPr>
+          <a:xfrm>
+            <a:off x="274320" y="1325880"/>
+            <a:ext cx="2103120" cy="1051560"/>
+          </a:xfrm>
+          <a:prstGeom prst="roundRect">
+            <a:avLst/>
+          </a:prstGeom>
+          <a:solidFill>
+            <a:srgbClr val="E7EEFB"/>
+          </a:solidFill>
+          <a:ln>
+            <a:noFill/>
+          </a:ln>
+        </p:spPr>
+        <p:style>
+          <a:lnRef idx="1">
+            <a:schemeClr val="accent1"/>
+          </a:lnRef>
+          <a:fillRef idx="3">
+            <a:schemeClr val="accent1"/>
+          </a:fillRef>
+          <a:effectRef idx="2">
+            <a:schemeClr val="accent1"/>
+          </a:effectRef>
+          <a:fontRef idx="minor">
+            <a:schemeClr val="lt1"/>
+          </a:fontRef>
+        </p:style>
+        <p:txBody>
+          <a:bodyPr rtlCol="0" anchor="ctr"/>
+          <a:lstStyle/>
+          <a:p>
+            <a:pPr algn="ctr"/>
+          </a:p>
+        </p:txBody>
+      </p:sp>
+      <p:sp>
+        <p:nvSpPr>
+          <p:cNvPr id="6" name="TextBox 5"/>
+          <p:cNvSpPr txBox="1"/>
+          <p:nvPr/>
+        </p:nvSpPr>
+        <p:spPr>
+          <a:xfrm>
+            <a:off x="274320" y="1417320"/>
+            <a:ext cx="2103120" cy="502920"/>
+          </a:xfrm>
+          <a:prstGeom prst="rect">
+            <a:avLst/>
+          </a:prstGeom>
+          <a:noFill/>
+        </p:spPr>
+        <p:txBody>
+          <a:bodyPr wrap="none">
+            <a:spAutoFit/>
+          </a:bodyPr>
+          <a:lstStyle/>
+          <a:p>
+            <a:pPr algn="ctr">
+              <a:spcAft>
+                <a:spcPts val="400"/>
+              </a:spcAft>
+              <a:defRPr sz="2200" b="1">
+                <a:solidFill>
+                  <a:srgbClr val="00366A"/>
+                </a:solidFill>
+                <a:latin typeface="Microsoft YaHei"/>
+              </a:defRPr>
+            </a:pPr>
+            <a:r>
+              <a:t>RIBA 1</a:t>
+            </a:r>
+          </a:p>
+        </p:txBody>
+      </p:sp>
+      <p:sp>
+        <p:nvSpPr>
+          <p:cNvPr id="7" name="TextBox 6"/>
+          <p:cNvSpPr txBox="1"/>
+          <p:nvPr/>
+        </p:nvSpPr>
+        <p:spPr>
+          <a:xfrm>
+            <a:off x="274320" y="1965960"/>
+            <a:ext cx="2103120" cy="365760"/>
+          </a:xfrm>
+          <a:prstGeom prst="rect">
+            <a:avLst/>
+          </a:prstGeom>
+          <a:noFill/>
+        </p:spPr>
+        <p:txBody>
+          <a:bodyPr wrap="none">
+            <a:spAutoFit/>
+          </a:bodyPr>
+          <a:lstStyle/>
+          <a:p>
+            <a:pPr algn="ctr">
+              <a:spcAft>
+                <a:spcPts val="400"/>
+              </a:spcAft>
+              <a:defRPr sz="900" b="0">
+                <a:solidFill>
+                  <a:srgbClr val="2C3E50"/>
+                </a:solidFill>
+                <a:latin typeface="Microsoft YaHei"/>
+              </a:defRPr>
+            </a:pPr>
+            <a:r>
+              <a:t>2026-05 FS 完成</a:t>
+            </a:r>
+          </a:p>
+        </p:txBody>
+      </p:sp>
+      <p:sp>
+        <p:nvSpPr>
+          <p:cNvPr id="8" name="Rounded Rectangle 7"/>
+          <p:cNvSpPr/>
+          <p:nvPr/>
+        </p:nvSpPr>
+        <p:spPr>
+          <a:xfrm>
+            <a:off x="2468880" y="1325880"/>
+            <a:ext cx="2103120" cy="1051560"/>
+          </a:xfrm>
+          <a:prstGeom prst="roundRect">
+            <a:avLst/>
+          </a:prstGeom>
+          <a:solidFill>
+            <a:srgbClr val="E7EEFB"/>
+          </a:solidFill>
+          <a:ln>
+            <a:noFill/>
+          </a:ln>
+        </p:spPr>
+        <p:style>
+          <a:lnRef idx="1">
+            <a:schemeClr val="accent1"/>
+          </a:lnRef>
+          <a:fillRef idx="3">
+            <a:schemeClr val="accent1"/>
+          </a:fillRef>
+          <a:effectRef idx="2">
+            <a:schemeClr val="accent1"/>
+          </a:effectRef>
+          <a:fontRef idx="minor">
+            <a:schemeClr val="lt1"/>
+          </a:fontRef>
+        </p:style>
+        <p:txBody>
+          <a:bodyPr rtlCol="0" anchor="ctr"/>
+          <a:lstStyle/>
+          <a:p>
+            <a:pPr algn="ctr"/>
+          </a:p>
+        </p:txBody>
+      </p:sp>
+      <p:sp>
+        <p:nvSpPr>
+          <p:cNvPr id="9" name="TextBox 8"/>
+          <p:cNvSpPr txBox="1"/>
+          <p:nvPr/>
+        </p:nvSpPr>
+        <p:spPr>
+          <a:xfrm>
+            <a:off x="2468880" y="1417320"/>
+            <a:ext cx="2103120" cy="502920"/>
+          </a:xfrm>
+          <a:prstGeom prst="rect">
+            <a:avLst/>
+          </a:prstGeom>
+          <a:noFill/>
+        </p:spPr>
+        <p:txBody>
+          <a:bodyPr wrap="none">
+            <a:spAutoFit/>
+          </a:bodyPr>
+          <a:lstStyle/>
+          <a:p>
+            <a:pPr algn="ctr">
+              <a:spcAft>
+                <a:spcPts val="400"/>
+              </a:spcAft>
+              <a:defRPr sz="2200" b="1">
+                <a:solidFill>
+                  <a:srgbClr val="00366A"/>
+                </a:solidFill>
+                <a:latin typeface="Microsoft YaHei"/>
+              </a:defRPr>
+            </a:pPr>
+            <a:r>
+              <a:t>£78.11M</a:t>
+            </a:r>
+          </a:p>
+        </p:txBody>
+      </p:sp>
+      <p:sp>
+        <p:nvSpPr>
+          <p:cNvPr id="10" name="TextBox 9"/>
+          <p:cNvSpPr txBox="1"/>
+          <p:nvPr/>
+        </p:nvSpPr>
+        <p:spPr>
+          <a:xfrm>
+            <a:off x="2468880" y="1965960"/>
+            <a:ext cx="2103120" cy="365760"/>
+          </a:xfrm>
+          <a:prstGeom prst="rect">
+            <a:avLst/>
+          </a:prstGeom>
+          <a:noFill/>
+        </p:spPr>
+        <p:txBody>
+          <a:bodyPr wrap="none">
+            <a:spAutoFit/>
+          </a:bodyPr>
+          <a:lstStyle/>
+          <a:p>
+            <a:pPr algn="ctr">
+              <a:spcAft>
+                <a:spcPts val="400"/>
+              </a:spcAft>
+              <a:defRPr sz="900" b="0">
+                <a:solidFill>
+                  <a:srgbClr val="2C3E50"/>
+                </a:solidFill>
+                <a:latin typeface="Microsoft YaHei"/>
+              </a:defRPr>
+            </a:pPr>
+            <a:r>
+              <a:t>项目总投资 OOM</a:t>
+            </a:r>
+          </a:p>
+        </p:txBody>
+      </p:sp>
+      <p:sp>
+        <p:nvSpPr>
+          <p:cNvPr id="11" name="Rounded Rectangle 10"/>
+          <p:cNvSpPr/>
+          <p:nvPr/>
+        </p:nvSpPr>
+        <p:spPr>
+          <a:xfrm>
+            <a:off x="4663440" y="1325880"/>
+            <a:ext cx="2103120" cy="1051560"/>
+          </a:xfrm>
+          <a:prstGeom prst="roundRect">
+            <a:avLst/>
+          </a:prstGeom>
+          <a:solidFill>
+            <a:srgbClr val="E7EEFB"/>
+          </a:solidFill>
+          <a:ln>
+            <a:noFill/>
+          </a:ln>
+        </p:spPr>
+        <p:style>
+          <a:lnRef idx="1">
+            <a:schemeClr val="accent1"/>
+          </a:lnRef>
+          <a:fillRef idx="3">
+            <a:schemeClr val="accent1"/>
+          </a:fillRef>
+          <a:effectRef idx="2">
+            <a:schemeClr val="accent1"/>
+          </a:effectRef>
+          <a:fontRef idx="minor">
+            <a:schemeClr val="lt1"/>
+          </a:fontRef>
+        </p:style>
+        <p:txBody>
+          <a:bodyPr rtlCol="0" anchor="ctr"/>
+          <a:lstStyle/>
+          <a:p>
+            <a:pPr algn="ctr"/>
+          </a:p>
+        </p:txBody>
+      </p:sp>
+      <p:sp>
+        <p:nvSpPr>
+          <p:cNvPr id="12" name="TextBox 11"/>
+          <p:cNvSpPr txBox="1"/>
+          <p:nvPr/>
+        </p:nvSpPr>
+        <p:spPr>
+          <a:xfrm>
+            <a:off x="4663440" y="1417320"/>
+            <a:ext cx="2103120" cy="502920"/>
+          </a:xfrm>
+          <a:prstGeom prst="rect">
+            <a:avLst/>
+          </a:prstGeom>
+          <a:noFill/>
+        </p:spPr>
+        <p:txBody>
+          <a:bodyPr wrap="none">
+            <a:spAutoFit/>
+          </a:bodyPr>
+          <a:lstStyle/>
+          <a:p>
+            <a:pPr algn="ctr">
+              <a:spcAft>
+                <a:spcPts val="400"/>
+              </a:spcAft>
+              <a:defRPr sz="2200" b="1">
+                <a:solidFill>
+                  <a:srgbClr val="00366A"/>
+                </a:solidFill>
+                <a:latin typeface="Microsoft YaHei"/>
+              </a:defRPr>
+            </a:pPr>
+            <a:r>
+              <a:t>3,099 m²</a:t>
+            </a:r>
+          </a:p>
+        </p:txBody>
+      </p:sp>
+      <p:sp>
+        <p:nvSpPr>
+          <p:cNvPr id="13" name="TextBox 12"/>
+          <p:cNvSpPr txBox="1"/>
+          <p:nvPr/>
+        </p:nvSpPr>
+        <p:spPr>
+          <a:xfrm>
+            <a:off x="4663440" y="1965960"/>
+            <a:ext cx="2103120" cy="365760"/>
+          </a:xfrm>
+          <a:prstGeom prst="rect">
+            <a:avLst/>
+          </a:prstGeom>
+          <a:noFill/>
+        </p:spPr>
+        <p:txBody>
+          <a:bodyPr wrap="none">
+            <a:spAutoFit/>
+          </a:bodyPr>
+          <a:lstStyle/>
+          <a:p>
+            <a:pPr algn="ctr">
+              <a:spcAft>
+                <a:spcPts val="400"/>
+              </a:spcAft>
+              <a:defRPr sz="900" b="0">
+                <a:solidFill>
+                  <a:srgbClr val="2C3E50"/>
+                </a:solidFill>
+                <a:latin typeface="Microsoft YaHei"/>
+              </a:defRPr>
+            </a:pPr>
+            <a:r>
+              <a:t>总建筑面积 GIFA</a:t>
+            </a:r>
+          </a:p>
+        </p:txBody>
+      </p:sp>
+      <p:sp>
+        <p:nvSpPr>
+          <p:cNvPr id="14" name="Rounded Rectangle 13"/>
+          <p:cNvSpPr/>
+          <p:nvPr/>
+        </p:nvSpPr>
+        <p:spPr>
+          <a:xfrm>
+            <a:off x="6858000" y="1325880"/>
+            <a:ext cx="2103120" cy="1051560"/>
+          </a:xfrm>
+          <a:prstGeom prst="roundRect">
+            <a:avLst/>
+          </a:prstGeom>
+          <a:solidFill>
+            <a:srgbClr val="E7EEFB"/>
+          </a:solidFill>
+          <a:ln>
+            <a:noFill/>
+          </a:ln>
+        </p:spPr>
+        <p:style>
+          <a:lnRef idx="1">
+            <a:schemeClr val="accent1"/>
+          </a:lnRef>
+          <a:fillRef idx="3">
+            <a:schemeClr val="accent1"/>
+          </a:fillRef>
+          <a:effectRef idx="2">
+            <a:schemeClr val="accent1"/>
+          </a:effectRef>
+          <a:fontRef idx="minor">
+            <a:schemeClr val="lt1"/>
+          </a:fontRef>
+        </p:style>
+        <p:txBody>
+          <a:bodyPr rtlCol="0" anchor="ctr"/>
+          <a:lstStyle/>
+          <a:p>
+            <a:pPr algn="ctr"/>
+          </a:p>
+        </p:txBody>
+      </p:sp>
+      <p:sp>
+        <p:nvSpPr>
+          <p:cNvPr id="15" name="TextBox 14"/>
+          <p:cNvSpPr txBox="1"/>
+          <p:nvPr/>
+        </p:nvSpPr>
+        <p:spPr>
+          <a:xfrm>
+            <a:off x="6858000" y="1417320"/>
+            <a:ext cx="2103120" cy="502920"/>
+          </a:xfrm>
+          <a:prstGeom prst="rect">
+            <a:avLst/>
+          </a:prstGeom>
+          <a:noFill/>
+        </p:spPr>
+        <p:txBody>
+          <a:bodyPr wrap="none">
+            <a:spAutoFit/>
+          </a:bodyPr>
+          <a:lstStyle/>
+          <a:p>
+            <a:pPr algn="ctr">
+              <a:spcAft>
+                <a:spcPts val="400"/>
+              </a:spcAft>
+              <a:defRPr sz="2200" b="1">
+                <a:solidFill>
+                  <a:srgbClr val="00366A"/>
+                </a:solidFill>
+                <a:latin typeface="Microsoft YaHei"/>
+              </a:defRPr>
+            </a:pPr>
+            <a:r>
+              <a:t>2030-05</a:t>
+            </a:r>
+          </a:p>
+        </p:txBody>
+      </p:sp>
+      <p:sp>
+        <p:nvSpPr>
+          <p:cNvPr id="16" name="TextBox 15"/>
+          <p:cNvSpPr txBox="1"/>
+          <p:nvPr/>
+        </p:nvSpPr>
+        <p:spPr>
+          <a:xfrm>
+            <a:off x="6858000" y="1965960"/>
+            <a:ext cx="2103120" cy="365760"/>
+          </a:xfrm>
+          <a:prstGeom prst="rect">
+            <a:avLst/>
+          </a:prstGeom>
+          <a:noFill/>
+        </p:spPr>
+        <p:txBody>
+          <a:bodyPr wrap="none">
+            <a:spAutoFit/>
+          </a:bodyPr>
+          <a:lstStyle/>
+          <a:p>
+            <a:pPr algn="ctr">
+              <a:spcAft>
+                <a:spcPts val="400"/>
+              </a:spcAft>
+              <a:defRPr sz="900" b="0">
+                <a:solidFill>
+                  <a:srgbClr val="2C3E50"/>
+                </a:solidFill>
+                <a:latin typeface="Microsoft YaHei"/>
+              </a:defRPr>
+            </a:pPr>
+            <a:r>
+              <a:t>总控竣工目标</a:t>
+            </a:r>
+          </a:p>
+        </p:txBody>
+      </p:sp>
+      <p:sp>
+        <p:nvSpPr>
+          <p:cNvPr id="17" name="Rectangle 16"/>
+          <p:cNvSpPr/>
+          <p:nvPr/>
+        </p:nvSpPr>
+        <p:spPr>
+          <a:xfrm>
+            <a:off x="274320" y="2468880"/>
+            <a:ext cx="2103120" cy="320040"/>
+          </a:xfrm>
+          <a:prstGeom prst="rect">
+            <a:avLst/>
+          </a:prstGeom>
+          <a:solidFill>
+            <a:srgbClr val="00366A"/>
+          </a:solidFill>
+          <a:ln>
+            <a:noFill/>
+          </a:ln>
+        </p:spPr>
+        <p:style>
+          <a:lnRef idx="1">
+            <a:schemeClr val="accent1"/>
+          </a:lnRef>
+          <a:fillRef idx="3">
+            <a:schemeClr val="accent1"/>
+          </a:fillRef>
+          <a:effectRef idx="2">
+            <a:schemeClr val="accent1"/>
+          </a:effectRef>
+          <a:fontRef idx="minor">
+            <a:schemeClr val="lt1"/>
+          </a:fontRef>
+        </p:style>
+        <p:txBody>
+          <a:bodyPr rtlCol="0" anchor="ctr"/>
+          <a:lstStyle/>
+          <a:p>
+            <a:pPr algn="ctr"/>
+          </a:p>
+        </p:txBody>
+      </p:sp>
+      <p:sp>
+        <p:nvSpPr>
+          <p:cNvPr id="18" name="TextBox 17"/>
+          <p:cNvSpPr txBox="1"/>
+          <p:nvPr/>
+        </p:nvSpPr>
+        <p:spPr>
+          <a:xfrm>
+            <a:off x="320040" y="2487168"/>
+            <a:ext cx="2011680" cy="320040"/>
+          </a:xfrm>
+          <a:prstGeom prst="rect">
+            <a:avLst/>
+          </a:prstGeom>
+          <a:noFill/>
+        </p:spPr>
+        <p:txBody>
+          <a:bodyPr wrap="none">
+            <a:spAutoFit/>
+          </a:bodyPr>
+          <a:lstStyle/>
+          <a:p>
+            <a:pPr algn="l">
+              <a:spcAft>
+                <a:spcPts val="400"/>
+              </a:spcAft>
+              <a:defRPr sz="1040" b="1">
+                <a:solidFill>
+                  <a:srgbClr val="FFFFFF"/>
+                </a:solidFill>
+                <a:latin typeface="Microsoft YaHei"/>
+              </a:defRPr>
+            </a:pPr>
+            <a:r>
+              <a:t>① FS 消化闭环</a:t>
+            </a:r>
+          </a:p>
+        </p:txBody>
+      </p:sp>
+      <p:sp>
+        <p:nvSpPr>
+          <p:cNvPr id="19" name="Rectangle 18"/>
+          <p:cNvSpPr/>
+          <p:nvPr/>
+        </p:nvSpPr>
+        <p:spPr>
+          <a:xfrm>
+            <a:off x="274320" y="2788920"/>
+            <a:ext cx="2103120" cy="1965960"/>
+          </a:xfrm>
+          <a:prstGeom prst="rect">
+            <a:avLst/>
+          </a:prstGeom>
+          <a:solidFill>
+            <a:srgbClr val="FFFFFF"/>
+          </a:solidFill>
+          <a:ln>
+            <a:solidFill>
+              <a:srgbClr val="D4DDE6"/>
+            </a:solidFill>
+          </a:ln>
+        </p:spPr>
+        <p:style>
+          <a:lnRef idx="1">
+            <a:schemeClr val="accent1"/>
+          </a:lnRef>
+          <a:fillRef idx="3">
+            <a:schemeClr val="accent1"/>
+          </a:fillRef>
+          <a:effectRef idx="2">
+            <a:schemeClr val="accent1"/>
+          </a:effectRef>
+          <a:fontRef idx="minor">
+            <a:schemeClr val="lt1"/>
+          </a:fontRef>
+        </p:style>
+        <p:txBody>
+          <a:bodyPr rtlCol="0" anchor="ctr"/>
+          <a:lstStyle/>
+          <a:p>
+            <a:pPr algn="ctr"/>
+          </a:p>
+        </p:txBody>
+      </p:sp>
+      <p:sp>
+        <p:nvSpPr>
+          <p:cNvPr id="20" name="TextBox 19"/>
+          <p:cNvSpPr txBox="1"/>
+          <p:nvPr/>
+        </p:nvSpPr>
+        <p:spPr>
+          <a:xfrm>
+            <a:off x="347472" y="2834640"/>
+            <a:ext cx="1956816" cy="1874520"/>
+          </a:xfrm>
+          <a:prstGeom prst="rect">
+            <a:avLst/>
+          </a:prstGeom>
+          <a:noFill/>
+        </p:spPr>
+        <p:txBody>
+          <a:bodyPr wrap="square" anchor="t">
+            <a:spAutoFit/>
+          </a:bodyPr>
+          <a:lstStyle/>
+          <a:p>
+            <a:pPr>
+              <a:spcAft>
+                <a:spcPts val="500"/>
+              </a:spcAft>
+              <a:defRPr sz="850">
+                <a:solidFill>
+                  <a:srgbClr val="0F2B46"/>
+                </a:solidFill>
+                <a:latin typeface="Microsoft YaHei"/>
+              </a:defRPr>
+            </a:pPr>
+            <a:r>
+              <a:t>• 全程参与 FS 讲解会，整理中文详细纪要</a:t>
+            </a:r>
+          </a:p>
+          <a:p>
+            <a:pPr>
+              <a:spcAft>
+                <a:spcPts val="500"/>
+              </a:spcAft>
+              <a:defRPr sz="850">
+                <a:solidFill>
+                  <a:srgbClr val="0F2B46"/>
+                </a:solidFill>
+                <a:latin typeface="Microsoft YaHei"/>
+              </a:defRPr>
+            </a:pPr>
+            <a:r>
+              <a:t>• 推动国内团队理解推荐方案及前提假设</a:t>
+            </a:r>
+          </a:p>
+          <a:p>
+            <a:pPr>
+              <a:spcAft>
+                <a:spcPts val="500"/>
+              </a:spcAft>
+              <a:defRPr sz="850">
+                <a:solidFill>
+                  <a:srgbClr val="0F2B46"/>
+                </a:solidFill>
+                <a:latin typeface="Microsoft YaHei"/>
+              </a:defRPr>
+            </a:pPr>
+            <a:r>
+              <a:t>• BREEAM 预评估 Very Good 基线</a:t>
+            </a:r>
+          </a:p>
+        </p:txBody>
+      </p:sp>
+      <p:sp>
+        <p:nvSpPr>
+          <p:cNvPr id="21" name="Rectangle 20"/>
+          <p:cNvSpPr/>
+          <p:nvPr/>
+        </p:nvSpPr>
+        <p:spPr>
+          <a:xfrm>
+            <a:off x="2468880" y="2468880"/>
+            <a:ext cx="2103120" cy="320040"/>
+          </a:xfrm>
+          <a:prstGeom prst="rect">
+            <a:avLst/>
+          </a:prstGeom>
+          <a:solidFill>
+            <a:srgbClr val="00366A"/>
+          </a:solidFill>
+          <a:ln>
+            <a:noFill/>
+          </a:ln>
+        </p:spPr>
+        <p:style>
+          <a:lnRef idx="1">
+            <a:schemeClr val="accent1"/>
+          </a:lnRef>
+          <a:fillRef idx="3">
+            <a:schemeClr val="accent1"/>
+          </a:fillRef>
+          <a:effectRef idx="2">
+            <a:schemeClr val="accent1"/>
+          </a:effectRef>
+          <a:fontRef idx="minor">
+            <a:schemeClr val="lt1"/>
+          </a:fontRef>
+        </p:style>
+        <p:txBody>
+          <a:bodyPr rtlCol="0" anchor="ctr"/>
+          <a:lstStyle/>
+          <a:p>
+            <a:pPr algn="ctr"/>
+          </a:p>
+        </p:txBody>
+      </p:sp>
+      <p:sp>
+        <p:nvSpPr>
+          <p:cNvPr id="22" name="TextBox 21"/>
+          <p:cNvSpPr txBox="1"/>
+          <p:nvPr/>
+        </p:nvSpPr>
+        <p:spPr>
+          <a:xfrm>
+            <a:off x="2514600" y="2487168"/>
+            <a:ext cx="2011680" cy="320040"/>
+          </a:xfrm>
+          <a:prstGeom prst="rect">
+            <a:avLst/>
+          </a:prstGeom>
+          <a:noFill/>
+        </p:spPr>
+        <p:txBody>
+          <a:bodyPr wrap="none">
+            <a:spAutoFit/>
+          </a:bodyPr>
+          <a:lstStyle/>
+          <a:p>
+            <a:pPr algn="l">
+              <a:spcAft>
+                <a:spcPts val="400"/>
+              </a:spcAft>
+              <a:defRPr sz="1040" b="1">
+                <a:solidFill>
+                  <a:srgbClr val="FFFFFF"/>
+                </a:solidFill>
+                <a:latin typeface="Microsoft YaHei"/>
+              </a:defRPr>
+            </a:pPr>
+            <a:r>
+              <a:t>② 投资与决策</a:t>
+            </a:r>
+          </a:p>
+        </p:txBody>
+      </p:sp>
+      <p:sp>
+        <p:nvSpPr>
+          <p:cNvPr id="23" name="Rectangle 22"/>
+          <p:cNvSpPr/>
+          <p:nvPr/>
+        </p:nvSpPr>
+        <p:spPr>
+          <a:xfrm>
+            <a:off x="2468880" y="2788920"/>
+            <a:ext cx="2103120" cy="1965960"/>
+          </a:xfrm>
+          <a:prstGeom prst="rect">
+            <a:avLst/>
+          </a:prstGeom>
+          <a:solidFill>
+            <a:srgbClr val="FFFFFF"/>
+          </a:solidFill>
+          <a:ln>
+            <a:solidFill>
+              <a:srgbClr val="D4DDE6"/>
+            </a:solidFill>
+          </a:ln>
+        </p:spPr>
+        <p:style>
+          <a:lnRef idx="1">
+            <a:schemeClr val="accent1"/>
+          </a:lnRef>
+          <a:fillRef idx="3">
+            <a:schemeClr val="accent1"/>
+          </a:fillRef>
+          <a:effectRef idx="2">
+            <a:schemeClr val="accent1"/>
+          </a:effectRef>
+          <a:fontRef idx="minor">
+            <a:schemeClr val="lt1"/>
+          </a:fontRef>
+        </p:style>
+        <p:txBody>
+          <a:bodyPr rtlCol="0" anchor="ctr"/>
+          <a:lstStyle/>
+          <a:p>
+            <a:pPr algn="ctr"/>
+          </a:p>
+        </p:txBody>
+      </p:sp>
+      <p:sp>
+        <p:nvSpPr>
+          <p:cNvPr id="24" name="TextBox 23"/>
+          <p:cNvSpPr txBox="1"/>
+          <p:nvPr/>
+        </p:nvSpPr>
+        <p:spPr>
+          <a:xfrm>
+            <a:off x="2542032" y="2834640"/>
+            <a:ext cx="1956816" cy="1874520"/>
+          </a:xfrm>
+          <a:prstGeom prst="rect">
+            <a:avLst/>
+          </a:prstGeom>
+          <a:noFill/>
+        </p:spPr>
+        <p:txBody>
+          <a:bodyPr wrap="square" anchor="t">
+            <a:spAutoFit/>
+          </a:bodyPr>
+          <a:lstStyle/>
+          <a:p>
+            <a:pPr>
+              <a:spcAft>
+                <a:spcPts val="500"/>
+              </a:spcAft>
+              <a:defRPr sz="850">
+                <a:solidFill>
+                  <a:srgbClr val="0F2B46"/>
+                </a:solidFill>
+                <a:latin typeface="Microsoft YaHei"/>
+              </a:defRPr>
+            </a:pPr>
+            <a:r>
+              <a:t>• 完成投资量级、风险与总控计划解读</a:t>
+            </a:r>
+          </a:p>
+          <a:p>
+            <a:pPr>
+              <a:spcAft>
+                <a:spcPts val="500"/>
+              </a:spcAft>
+              <a:defRPr sz="850">
+                <a:solidFill>
+                  <a:srgbClr val="0F2B46"/>
+                </a:solidFill>
+                <a:latin typeface="Microsoft YaHei"/>
+              </a:defRPr>
+            </a:pPr>
+            <a:r>
+              <a:t>• 编制管理层汇报材料支撑决策</a:t>
+            </a:r>
+          </a:p>
+          <a:p>
+            <a:pPr>
+              <a:spcAft>
+                <a:spcPts val="500"/>
+              </a:spcAft>
+              <a:defRPr sz="850">
+                <a:solidFill>
+                  <a:srgbClr val="0F2B46"/>
+                </a:solidFill>
+                <a:latin typeface="Microsoft YaHei"/>
+              </a:defRPr>
+            </a:pPr>
+            <a:r>
+              <a:t>• 10 釜 + 2500L 加氢釜 + 3 套过滤干燥机</a:t>
+            </a:r>
+          </a:p>
+        </p:txBody>
+      </p:sp>
+      <p:sp>
+        <p:nvSpPr>
+          <p:cNvPr id="25" name="Rectangle 24"/>
+          <p:cNvSpPr/>
+          <p:nvPr/>
+        </p:nvSpPr>
+        <p:spPr>
+          <a:xfrm>
+            <a:off x="4663440" y="2468880"/>
+            <a:ext cx="2103120" cy="320040"/>
+          </a:xfrm>
+          <a:prstGeom prst="rect">
+            <a:avLst/>
+          </a:prstGeom>
+          <a:solidFill>
+            <a:srgbClr val="00366A"/>
+          </a:solidFill>
+          <a:ln>
+            <a:noFill/>
+          </a:ln>
+        </p:spPr>
+        <p:style>
+          <a:lnRef idx="1">
+            <a:schemeClr val="accent1"/>
+          </a:lnRef>
+          <a:fillRef idx="3">
+            <a:schemeClr val="accent1"/>
+          </a:fillRef>
+          <a:effectRef idx="2">
+            <a:schemeClr val="accent1"/>
+          </a:effectRef>
+          <a:fontRef idx="minor">
+            <a:schemeClr val="lt1"/>
+          </a:fontRef>
+        </p:style>
+        <p:txBody>
+          <a:bodyPr rtlCol="0" anchor="ctr"/>
+          <a:lstStyle/>
+          <a:p>
+            <a:pPr algn="ctr"/>
+          </a:p>
+        </p:txBody>
+      </p:sp>
+      <p:sp>
+        <p:nvSpPr>
+          <p:cNvPr id="26" name="TextBox 25"/>
+          <p:cNvSpPr txBox="1"/>
+          <p:nvPr/>
+        </p:nvSpPr>
+        <p:spPr>
+          <a:xfrm>
+            <a:off x="4709160" y="2487168"/>
+            <a:ext cx="2011680" cy="320040"/>
+          </a:xfrm>
+          <a:prstGeom prst="rect">
+            <a:avLst/>
+          </a:prstGeom>
+          <a:noFill/>
+        </p:spPr>
+        <p:txBody>
+          <a:bodyPr wrap="none">
+            <a:spAutoFit/>
+          </a:bodyPr>
+          <a:lstStyle/>
+          <a:p>
+            <a:pPr algn="l">
+              <a:spcAft>
+                <a:spcPts val="400"/>
+              </a:spcAft>
+              <a:defRPr sz="1040" b="1">
+                <a:solidFill>
+                  <a:srgbClr val="FFFFFF"/>
+                </a:solidFill>
+                <a:latin typeface="Microsoft YaHei"/>
+              </a:defRPr>
+            </a:pPr>
+            <a:r>
+              <a:t>③ 关键事项跟进</a:t>
+            </a:r>
+          </a:p>
+        </p:txBody>
+      </p:sp>
+      <p:sp>
+        <p:nvSpPr>
+          <p:cNvPr id="27" name="Rectangle 26"/>
+          <p:cNvSpPr/>
+          <p:nvPr/>
+        </p:nvSpPr>
+        <p:spPr>
+          <a:xfrm>
+            <a:off x="4663440" y="2788920"/>
+            <a:ext cx="2103120" cy="1965960"/>
+          </a:xfrm>
+          <a:prstGeom prst="rect">
+            <a:avLst/>
+          </a:prstGeom>
+          <a:solidFill>
+            <a:srgbClr val="FFFFFF"/>
+          </a:solidFill>
+          <a:ln>
+            <a:solidFill>
+              <a:srgbClr val="D4DDE6"/>
+            </a:solidFill>
+          </a:ln>
+        </p:spPr>
+        <p:style>
+          <a:lnRef idx="1">
+            <a:schemeClr val="accent1"/>
+          </a:lnRef>
+          <a:fillRef idx="3">
+            <a:schemeClr val="accent1"/>
+          </a:fillRef>
+          <a:effectRef idx="2">
+            <a:schemeClr val="accent1"/>
+          </a:effectRef>
+          <a:fontRef idx="minor">
+            <a:schemeClr val="lt1"/>
+          </a:fontRef>
+        </p:style>
+        <p:txBody>
+          <a:bodyPr rtlCol="0" anchor="ctr"/>
+          <a:lstStyle/>
+          <a:p>
+            <a:pPr algn="ctr"/>
+          </a:p>
+        </p:txBody>
+      </p:sp>
+      <p:sp>
+        <p:nvSpPr>
+          <p:cNvPr id="28" name="TextBox 27"/>
+          <p:cNvSpPr txBox="1"/>
+          <p:nvPr/>
+        </p:nvSpPr>
+        <p:spPr>
+          <a:xfrm>
+            <a:off x="4736592" y="2834640"/>
+            <a:ext cx="1956816" cy="1874520"/>
+          </a:xfrm>
+          <a:prstGeom prst="rect">
+            <a:avLst/>
+          </a:prstGeom>
+          <a:noFill/>
+        </p:spPr>
+        <p:txBody>
+          <a:bodyPr wrap="square" anchor="t">
+            <a:spAutoFit/>
+          </a:bodyPr>
+          <a:lstStyle/>
+          <a:p>
+            <a:pPr>
+              <a:spcAft>
+                <a:spcPts val="500"/>
+              </a:spcAft>
+              <a:defRPr sz="850">
+                <a:solidFill>
+                  <a:srgbClr val="0F2B46"/>
+                </a:solidFill>
+                <a:latin typeface="Microsoft YaHei"/>
+              </a:defRPr>
+            </a:pPr>
+            <a:r>
+              <a:t>• 加氢厂房处置、首层净高等中外确认项</a:t>
+            </a:r>
+          </a:p>
+          <a:p>
+            <a:pPr>
+              <a:spcAft>
+                <a:spcPts val="500"/>
+              </a:spcAft>
+              <a:defRPr sz="850">
+                <a:solidFill>
+                  <a:srgbClr val="0F2B46"/>
+                </a:solidFill>
+                <a:latin typeface="Microsoft YaHei"/>
+              </a:defRPr>
+            </a:pPr>
+            <a:r>
+              <a:t>• 长周期设备采购分工待明确</a:t>
+            </a:r>
+          </a:p>
+          <a:p>
+            <a:pPr>
+              <a:spcAft>
+                <a:spcPts val="500"/>
+              </a:spcAft>
+              <a:defRPr sz="850">
+                <a:solidFill>
+                  <a:srgbClr val="0F2B46"/>
+                </a:solidFill>
+                <a:latin typeface="Microsoft YaHei"/>
+              </a:defRPr>
+            </a:pPr>
+            <a:r>
+              <a:t>• 促进信息对称、问题及时闭环</a:t>
+            </a:r>
+          </a:p>
+        </p:txBody>
+      </p:sp>
+      <p:sp>
+        <p:nvSpPr>
+          <p:cNvPr id="29" name="Rectangle 28"/>
+          <p:cNvSpPr/>
+          <p:nvPr/>
+        </p:nvSpPr>
+        <p:spPr>
+          <a:xfrm>
+            <a:off x="6858000" y="2468880"/>
+            <a:ext cx="2103120" cy="320040"/>
+          </a:xfrm>
+          <a:prstGeom prst="rect">
+            <a:avLst/>
+          </a:prstGeom>
+          <a:solidFill>
+            <a:srgbClr val="00366A"/>
+          </a:solidFill>
+          <a:ln>
+            <a:noFill/>
+          </a:ln>
+        </p:spPr>
+        <p:style>
+          <a:lnRef idx="1">
+            <a:schemeClr val="accent1"/>
+          </a:lnRef>
+          <a:fillRef idx="3">
+            <a:schemeClr val="accent1"/>
+          </a:fillRef>
+          <a:effectRef idx="2">
+            <a:schemeClr val="accent1"/>
+          </a:effectRef>
+          <a:fontRef idx="minor">
+            <a:schemeClr val="lt1"/>
+          </a:fontRef>
+        </p:style>
+        <p:txBody>
+          <a:bodyPr rtlCol="0" anchor="ctr"/>
+          <a:lstStyle/>
+          <a:p>
+            <a:pPr algn="ctr"/>
+          </a:p>
+        </p:txBody>
+      </p:sp>
+      <p:sp>
+        <p:nvSpPr>
+          <p:cNvPr id="30" name="TextBox 29"/>
+          <p:cNvSpPr txBox="1"/>
+          <p:nvPr/>
+        </p:nvSpPr>
+        <p:spPr>
+          <a:xfrm>
+            <a:off x="6903720" y="2487168"/>
+            <a:ext cx="2011680" cy="320040"/>
+          </a:xfrm>
+          <a:prstGeom prst="rect">
+            <a:avLst/>
+          </a:prstGeom>
+          <a:noFill/>
+        </p:spPr>
+        <p:txBody>
+          <a:bodyPr wrap="none">
+            <a:spAutoFit/>
+          </a:bodyPr>
+          <a:lstStyle/>
+          <a:p>
+            <a:pPr algn="l">
+              <a:spcAft>
+                <a:spcPts val="400"/>
+              </a:spcAft>
+              <a:defRPr sz="1040" b="1">
+                <a:solidFill>
+                  <a:srgbClr val="FFFFFF"/>
+                </a:solidFill>
+                <a:latin typeface="Microsoft YaHei"/>
+              </a:defRPr>
+            </a:pPr>
+            <a:r>
+              <a:t>④ 下半年重点</a:t>
+            </a:r>
+          </a:p>
+        </p:txBody>
+      </p:sp>
+      <p:sp>
+        <p:nvSpPr>
+          <p:cNvPr id="31" name="Rectangle 30"/>
+          <p:cNvSpPr/>
+          <p:nvPr/>
+        </p:nvSpPr>
+        <p:spPr>
+          <a:xfrm>
+            <a:off x="6858000" y="2788920"/>
+            <a:ext cx="2103120" cy="1965960"/>
+          </a:xfrm>
+          <a:prstGeom prst="rect">
+            <a:avLst/>
+          </a:prstGeom>
+          <a:solidFill>
+            <a:srgbClr val="FFFFFF"/>
+          </a:solidFill>
+          <a:ln>
+            <a:solidFill>
+              <a:srgbClr val="D4DDE6"/>
+            </a:solidFill>
+          </a:ln>
+        </p:spPr>
+        <p:style>
+          <a:lnRef idx="1">
+            <a:schemeClr val="accent1"/>
+          </a:lnRef>
+          <a:fillRef idx="3">
+            <a:schemeClr val="accent1"/>
+          </a:fillRef>
+          <a:effectRef idx="2">
+            <a:schemeClr val="accent1"/>
+          </a:effectRef>
+          <a:fontRef idx="minor">
+            <a:schemeClr val="lt1"/>
+          </a:fontRef>
+        </p:style>
+        <p:txBody>
+          <a:bodyPr rtlCol="0" anchor="ctr"/>
+          <a:lstStyle/>
+          <a:p>
+            <a:pPr algn="ctr"/>
+          </a:p>
+        </p:txBody>
+      </p:sp>
+      <p:sp>
+        <p:nvSpPr>
+          <p:cNvPr id="32" name="TextBox 31"/>
+          <p:cNvSpPr txBox="1"/>
+          <p:nvPr/>
+        </p:nvSpPr>
+        <p:spPr>
+          <a:xfrm>
+            <a:off x="6931152" y="2834640"/>
+            <a:ext cx="1956816" cy="1874520"/>
+          </a:xfrm>
+          <a:prstGeom prst="rect">
+            <a:avLst/>
+          </a:prstGeom>
+          <a:noFill/>
+        </p:spPr>
+        <p:txBody>
+          <a:bodyPr wrap="square" anchor="t">
+            <a:spAutoFit/>
+          </a:bodyPr>
+          <a:lstStyle/>
+          <a:p>
+            <a:pPr>
+              <a:spcAft>
+                <a:spcPts val="500"/>
+              </a:spcAft>
+              <a:defRPr sz="850">
+                <a:solidFill>
+                  <a:srgbClr val="0F2B46"/>
+                </a:solidFill>
+                <a:latin typeface="Microsoft YaHei"/>
+              </a:defRPr>
+            </a:pPr>
+            <a:r>
+              <a:t>• RIBA 2 概念设计启动（7月计划）</a:t>
+            </a:r>
+          </a:p>
+          <a:p>
+            <a:pPr>
+              <a:spcAft>
+                <a:spcPts val="500"/>
+              </a:spcAft>
+              <a:defRPr sz="850">
+                <a:solidFill>
+                  <a:srgbClr val="0F2B46"/>
+                </a:solidFill>
+                <a:latin typeface="Microsoft YaHei"/>
+              </a:defRPr>
+            </a:pPr>
+            <a:r>
+              <a:t>• 关键方案国内确认</a:t>
+            </a:r>
+          </a:p>
+          <a:p>
+            <a:pPr>
+              <a:spcAft>
+                <a:spcPts val="500"/>
+              </a:spcAft>
+              <a:defRPr sz="850">
+                <a:solidFill>
+                  <a:srgbClr val="0F2B46"/>
+                </a:solidFill>
+                <a:latin typeface="Microsoft YaHei"/>
+              </a:defRPr>
+            </a:pPr>
+            <a:r>
+              <a:t>• 设计工作坊与 Stage 2 报价对接</a:t>
+            </a:r>
+          </a:p>
+        </p:txBody>
+      </p:sp>
+      <p:sp>
+        <p:nvSpPr>
+          <p:cNvPr id="33" name="TextBox 32"/>
+          <p:cNvSpPr txBox="1"/>
+          <p:nvPr/>
+        </p:nvSpPr>
+        <p:spPr>
+          <a:xfrm>
+            <a:off x="274320" y="4892040"/>
+            <a:ext cx="2103120" cy="182880"/>
+          </a:xfrm>
+          <a:prstGeom prst="rect">
+            <a:avLst/>
+          </a:prstGeom>
+          <a:noFill/>
+        </p:spPr>
+        <p:txBody>
+          <a:bodyPr wrap="none">
+            <a:spAutoFit/>
+          </a:bodyPr>
+          <a:lstStyle/>
+          <a:p>
+            <a:pPr algn="l">
+              <a:spcAft>
+                <a:spcPts val="400"/>
+              </a:spcAft>
+              <a:defRPr sz="700" b="0">
+                <a:solidFill>
+                  <a:srgbClr val="2C3E50"/>
+                </a:solidFill>
+                <a:latin typeface="Microsoft YaHei"/>
+              </a:defRPr>
+            </a:pPr>
+            <a:r>
+              <a:t>www.asymchem.com.cn</a:t>
+            </a:r>
+          </a:p>
+        </p:txBody>
+      </p:sp>
+      <p:sp>
+        <p:nvSpPr>
+          <p:cNvPr id="34" name="TextBox 33"/>
+          <p:cNvSpPr txBox="1"/>
+          <p:nvPr/>
+        </p:nvSpPr>
+        <p:spPr>
+          <a:xfrm>
+            <a:off x="2377440" y="4892040"/>
+            <a:ext cx="2286000" cy="182880"/>
+          </a:xfrm>
+          <a:prstGeom prst="rect">
+            <a:avLst/>
+          </a:prstGeom>
+          <a:noFill/>
+        </p:spPr>
+        <p:txBody>
+          <a:bodyPr wrap="none">
+            <a:spAutoFit/>
+          </a:bodyPr>
+          <a:lstStyle/>
+          <a:p>
+            <a:pPr algn="l">
+              <a:spcAft>
+                <a:spcPts val="400"/>
+              </a:spcAft>
+              <a:defRPr sz="700" b="0">
+                <a:solidFill>
+                  <a:srgbClr val="2C3E50"/>
+                </a:solidFill>
+                <a:latin typeface="Microsoft YaHei"/>
+              </a:defRPr>
+            </a:pPr>
+            <a:r>
+              <a:t>Stock Code: 002821.SZ / 6821.HK</a:t>
+            </a:r>
+          </a:p>
+        </p:txBody>
+      </p:sp>
+      <p:sp>
+        <p:nvSpPr>
+          <p:cNvPr id="35" name="TextBox 34"/>
+          <p:cNvSpPr txBox="1"/>
+          <p:nvPr/>
+        </p:nvSpPr>
+        <p:spPr>
+          <a:xfrm>
+            <a:off x="8595360" y="4892040"/>
+            <a:ext cx="457200" cy="182880"/>
+          </a:xfrm>
+          <a:prstGeom prst="rect">
+            <a:avLst/>
+          </a:prstGeom>
+          <a:noFill/>
+        </p:spPr>
+        <p:txBody>
+          <a:bodyPr wrap="none">
+            <a:spAutoFit/>
+          </a:bodyPr>
+          <a:lstStyle/>
+          <a:p>
+            <a:pPr algn="r">
+              <a:spcAft>
+                <a:spcPts val="400"/>
+              </a:spcAft>
+              <a:defRPr sz="700" b="0">
+                <a:solidFill>
+                  <a:srgbClr val="2C3E50"/>
+                </a:solidFill>
+                <a:latin typeface="Microsoft YaHei"/>
+              </a:defRPr>
+            </a:pPr>
+            <a:r>
+              <a:t>10</a:t>
+            </a:r>
+          </a:p>
+        </p:txBody>
+      </p:sp>
+    </p:spTree>
+  </p:cSld>
+  <p:clrMapOvr>
+    <a:masterClrMapping/>
+  </p:clrMapOvr>
+</p:sld>
+</file>
+
+<file path=ppt/slides/slide17.xml><?xml version="1.0" encoding="utf-8"?>
+<p:sld xmlns:a="http://schemas.openxmlformats.org/drawingml/2006/main" xmlns:p="http://schemas.openxmlformats.org/presentationml/2006/main" xmlns:r="http://schemas.openxmlformats.org/officeDocument/2006/relationships">
+  <p:cSld>
+    <p:spTree>
+      <p:nvGrpSpPr>
+        <p:cNvPr id="1" name=""/>
+        <p:cNvGrpSpPr/>
+        <p:nvPr/>
+      </p:nvGrpSpPr>
+      <p:grpSpPr/>
+      <p:sp>
+        <p:nvSpPr>
+          <p:cNvPr id="2" name="TextBox 1"/>
+          <p:cNvSpPr txBox="1"/>
+          <p:nvPr/>
+        </p:nvSpPr>
+        <p:spPr>
+          <a:xfrm>
+            <a:off x="3200400" y="182880"/>
+            <a:ext cx="5760720" cy="457200"/>
+          </a:xfrm>
+          <a:prstGeom prst="rect">
+            <a:avLst/>
+          </a:prstGeom>
+          <a:noFill/>
+        </p:spPr>
+        <p:txBody>
+          <a:bodyPr wrap="none">
+            <a:spAutoFit/>
+          </a:bodyPr>
+          <a:lstStyle/>
+          <a:p>
+            <a:pPr algn="l">
+              <a:spcAft>
+                <a:spcPts val="400"/>
+              </a:spcAft>
+              <a:defRPr sz="2000" b="1">
+                <a:solidFill>
+                  <a:srgbClr val="00366A"/>
+                </a:solidFill>
+                <a:latin typeface="Microsoft YaHei"/>
+              </a:defRPr>
+            </a:pPr>
+            <a:r>
+              <a:t>902 东侧扩建 · 投资结构与总控节奏</a:t>
+            </a:r>
+          </a:p>
+        </p:txBody>
+      </p:sp>
+      <p:sp>
+        <p:nvSpPr>
+          <p:cNvPr id="3" name="Rectangle 2"/>
+          <p:cNvSpPr/>
+          <p:nvPr/>
+        </p:nvSpPr>
+        <p:spPr>
+          <a:xfrm>
+            <a:off x="274320" y="777240"/>
+            <a:ext cx="8595360" cy="27432"/>
+          </a:xfrm>
+          <a:prstGeom prst="rect">
+            <a:avLst/>
+          </a:prstGeom>
+          <a:solidFill>
+            <a:srgbClr val="FF7E3D"/>
+          </a:solidFill>
+          <a:ln>
+            <a:noFill/>
+          </a:ln>
+        </p:spPr>
+        <p:style>
+          <a:lnRef idx="1">
+            <a:schemeClr val="accent1"/>
+          </a:lnRef>
+          <a:fillRef idx="3">
+            <a:schemeClr val="accent1"/>
+          </a:fillRef>
+          <a:effectRef idx="2">
+            <a:schemeClr val="accent1"/>
+          </a:effectRef>
+          <a:fontRef idx="minor">
+            <a:schemeClr val="lt1"/>
+          </a:fontRef>
+        </p:style>
+        <p:txBody>
+          <a:bodyPr rtlCol="0" anchor="ctr"/>
+          <a:lstStyle/>
+          <a:p>
+            <a:pPr algn="ctr"/>
+          </a:p>
+        </p:txBody>
+      </p:sp>
+      <p:sp>
+        <p:nvSpPr>
+          <p:cNvPr id="4" name="TextBox 3"/>
+          <p:cNvSpPr txBox="1"/>
+          <p:nvPr/>
+        </p:nvSpPr>
+        <p:spPr>
+          <a:xfrm>
+            <a:off x="274320" y="914400"/>
+            <a:ext cx="8595360" cy="329184"/>
+          </a:xfrm>
+          <a:prstGeom prst="rect">
+            <a:avLst/>
+          </a:prstGeom>
+          <a:noFill/>
+        </p:spPr>
+        <p:txBody>
+          <a:bodyPr wrap="none">
+            <a:spAutoFit/>
+          </a:bodyPr>
+          <a:lstStyle/>
+          <a:p>
+            <a:pPr algn="l">
+              <a:spcAft>
+                <a:spcPts val="400"/>
+              </a:spcAft>
+              <a:defRPr sz="950" b="0">
+                <a:solidFill>
+                  <a:srgbClr val="2C3E50"/>
+                </a:solidFill>
+                <a:latin typeface="Microsoft YaHei"/>
+              </a:defRPr>
+            </a:pPr>
+            <a:r>
+              <a:t>东侧约 600 m² 占地 · 四层+设备夹层 · 与 902 低层楼面贯通 · 总控 1,005 天</a:t>
+            </a:r>
+          </a:p>
+        </p:txBody>
+      </p:sp>
+      <p:pic>
+        <p:nvPicPr>
+          <p:cNvPr id="5" name="Picture 4" descr="ext_capex.png"/>
+          <p:cNvPicPr>
+            <a:picLocks noChangeAspect="1"/>
+          </p:cNvPicPr>
+          <p:nvPr/>
+        </p:nvPicPr>
+        <p:blipFill>
+          <a:blip r:embed="rId2"/>
+          <a:stretch>
+            <a:fillRect/>
+          </a:stretch>
+        </p:blipFill>
+        <p:spPr>
+          <a:xfrm>
+            <a:off x="274320" y="1325880"/>
+            <a:ext cx="4160520" cy="3246120"/>
+          </a:xfrm>
+          <a:prstGeom prst="rect">
+            <a:avLst/>
+          </a:prstGeom>
+        </p:spPr>
+      </p:pic>
+      <p:pic>
+        <p:nvPicPr>
+          <p:cNvPr id="6" name="Picture 5" descr="ext_gantt.png"/>
+          <p:cNvPicPr>
+            <a:picLocks noChangeAspect="1"/>
+          </p:cNvPicPr>
+          <p:nvPr/>
+        </p:nvPicPr>
+        <p:blipFill>
+          <a:blip r:embed="rId3"/>
+          <a:stretch>
+            <a:fillRect/>
+          </a:stretch>
+        </p:blipFill>
+        <p:spPr>
+          <a:xfrm>
+            <a:off x="4572000" y="1325880"/>
+            <a:ext cx="4297680" cy="3246120"/>
+          </a:xfrm>
+          <a:prstGeom prst="rect">
+            <a:avLst/>
+          </a:prstGeom>
+        </p:spPr>
+      </p:pic>
+      <p:sp>
+        <p:nvSpPr>
+          <p:cNvPr id="7" name="Rounded Rectangle 6"/>
+          <p:cNvSpPr/>
+          <p:nvPr/>
+        </p:nvSpPr>
+        <p:spPr>
+          <a:xfrm>
+            <a:off x="274320" y="4617720"/>
+            <a:ext cx="2057400" cy="502920"/>
+          </a:xfrm>
+          <a:prstGeom prst="roundRect">
+            <a:avLst/>
+          </a:prstGeom>
+          <a:solidFill>
+            <a:srgbClr val="E7EEFB"/>
+          </a:solidFill>
+          <a:ln>
+            <a:solidFill>
+              <a:srgbClr val="1A4A6E"/>
+            </a:solidFill>
+          </a:ln>
+        </p:spPr>
+        <p:style>
+          <a:lnRef idx="1">
+            <a:schemeClr val="accent1"/>
+          </a:lnRef>
+          <a:fillRef idx="3">
+            <a:schemeClr val="accent1"/>
+          </a:fillRef>
+          <a:effectRef idx="2">
+            <a:schemeClr val="accent1"/>
+          </a:effectRef>
+          <a:fontRef idx="minor">
+            <a:schemeClr val="lt1"/>
+          </a:fontRef>
+        </p:style>
+        <p:txBody>
+          <a:bodyPr rtlCol="0" anchor="ctr"/>
+          <a:lstStyle/>
+          <a:p>
+            <a:pPr algn="ctr"/>
+          </a:p>
+        </p:txBody>
+      </p:sp>
+      <p:sp>
+        <p:nvSpPr>
+          <p:cNvPr id="8" name="TextBox 7"/>
+          <p:cNvSpPr txBox="1"/>
+          <p:nvPr/>
+        </p:nvSpPr>
+        <p:spPr>
+          <a:xfrm>
+            <a:off x="365760" y="4645152"/>
+            <a:ext cx="1874519" cy="457200"/>
+          </a:xfrm>
+          <a:prstGeom prst="rect">
+            <a:avLst/>
+          </a:prstGeom>
+          <a:noFill/>
+        </p:spPr>
+        <p:txBody>
+          <a:bodyPr wrap="none">
+            <a:spAutoFit/>
+          </a:bodyPr>
+          <a:lstStyle/>
+          <a:p>
+            <a:r>
+              <a:rPr sz="800" b="1">
+                <a:solidFill>
+                  <a:srgbClr val="00366A"/>
+                </a:solidFill>
+                <a:latin typeface="Microsoft YaHei"/>
+              </a:rPr>
+              <a:t>H2 2026  </a:t>
+            </a:r>
+            <a:r>
+              <a:rPr sz="750" b="0">
+                <a:solidFill>
+                  <a:srgbClr val="0F2B46"/>
+                </a:solidFill>
+                <a:latin typeface="Microsoft YaHei"/>
+              </a:rPr>
+              <a:t>RIBA 2 概念设计
+Stage 2 报价确认</a:t>
+            </a:r>
+          </a:p>
+        </p:txBody>
+      </p:sp>
+      <p:sp>
+        <p:nvSpPr>
+          <p:cNvPr id="9" name="Rounded Rectangle 8"/>
+          <p:cNvSpPr/>
+          <p:nvPr/>
+        </p:nvSpPr>
+        <p:spPr>
+          <a:xfrm>
+            <a:off x="2468880" y="4617720"/>
+            <a:ext cx="2057400" cy="502920"/>
+          </a:xfrm>
+          <a:prstGeom prst="roundRect">
+            <a:avLst/>
+          </a:prstGeom>
+          <a:solidFill>
+            <a:srgbClr val="E7EEFB"/>
+          </a:solidFill>
+          <a:ln>
+            <a:solidFill>
+              <a:srgbClr val="1A4A6E"/>
+            </a:solidFill>
+          </a:ln>
+        </p:spPr>
+        <p:style>
+          <a:lnRef idx="1">
+            <a:schemeClr val="accent1"/>
+          </a:lnRef>
+          <a:fillRef idx="3">
+            <a:schemeClr val="accent1"/>
+          </a:fillRef>
+          <a:effectRef idx="2">
+            <a:schemeClr val="accent1"/>
+          </a:effectRef>
+          <a:fontRef idx="minor">
+            <a:schemeClr val="lt1"/>
+          </a:fontRef>
+        </p:style>
+        <p:txBody>
+          <a:bodyPr rtlCol="0" anchor="ctr"/>
+          <a:lstStyle/>
+          <a:p>
+            <a:pPr algn="ctr"/>
+          </a:p>
+        </p:txBody>
+      </p:sp>
+      <p:sp>
+        <p:nvSpPr>
+          <p:cNvPr id="10" name="TextBox 9"/>
+          <p:cNvSpPr txBox="1"/>
+          <p:nvPr/>
+        </p:nvSpPr>
+        <p:spPr>
+          <a:xfrm>
+            <a:off x="2560320" y="4645152"/>
+            <a:ext cx="1874519" cy="457200"/>
+          </a:xfrm>
+          <a:prstGeom prst="rect">
+            <a:avLst/>
+          </a:prstGeom>
+          <a:noFill/>
+        </p:spPr>
+        <p:txBody>
+          <a:bodyPr wrap="none">
+            <a:spAutoFit/>
+          </a:bodyPr>
+          <a:lstStyle/>
+          <a:p>
+            <a:r>
+              <a:rPr sz="800" b="1">
+                <a:solidFill>
+                  <a:srgbClr val="00366A"/>
+                </a:solidFill>
+                <a:latin typeface="Microsoft YaHei"/>
+              </a:rPr>
+              <a:t>2027  </a:t>
+            </a:r>
+            <a:r>
+              <a:rPr sz="750" b="0">
+                <a:solidFill>
+                  <a:srgbClr val="0F2B46"/>
+                </a:solidFill>
+                <a:latin typeface="Microsoft YaHei"/>
+              </a:rPr>
+              <a:t>方案设计 +
+规划审批</a:t>
+            </a:r>
+          </a:p>
+        </p:txBody>
+      </p:sp>
+      <p:sp>
+        <p:nvSpPr>
+          <p:cNvPr id="11" name="Rounded Rectangle 10"/>
+          <p:cNvSpPr/>
+          <p:nvPr/>
+        </p:nvSpPr>
+        <p:spPr>
+          <a:xfrm>
+            <a:off x="4663440" y="4617720"/>
+            <a:ext cx="2057400" cy="502920"/>
+          </a:xfrm>
+          <a:prstGeom prst="roundRect">
+            <a:avLst/>
+          </a:prstGeom>
+          <a:solidFill>
+            <a:srgbClr val="E7EEFB"/>
+          </a:solidFill>
+          <a:ln>
+            <a:solidFill>
+              <a:srgbClr val="1A4A6E"/>
+            </a:solidFill>
+          </a:ln>
+        </p:spPr>
+        <p:style>
+          <a:lnRef idx="1">
+            <a:schemeClr val="accent1"/>
+          </a:lnRef>
+          <a:fillRef idx="3">
+            <a:schemeClr val="accent1"/>
+          </a:fillRef>
+          <a:effectRef idx="2">
+            <a:schemeClr val="accent1"/>
+          </a:effectRef>
+          <a:fontRef idx="minor">
+            <a:schemeClr val="lt1"/>
+          </a:fontRef>
+        </p:style>
+        <p:txBody>
+          <a:bodyPr rtlCol="0" anchor="ctr"/>
+          <a:lstStyle/>
+          <a:p>
+            <a:pPr algn="ctr"/>
+          </a:p>
+        </p:txBody>
+      </p:sp>
+      <p:sp>
+        <p:nvSpPr>
+          <p:cNvPr id="12" name="TextBox 11"/>
+          <p:cNvSpPr txBox="1"/>
+          <p:nvPr/>
+        </p:nvSpPr>
+        <p:spPr>
+          <a:xfrm>
+            <a:off x="4754880" y="4645152"/>
+            <a:ext cx="1874519" cy="457200"/>
+          </a:xfrm>
+          <a:prstGeom prst="rect">
+            <a:avLst/>
+          </a:prstGeom>
+          <a:noFill/>
+        </p:spPr>
+        <p:txBody>
+          <a:bodyPr wrap="none">
+            <a:spAutoFit/>
+          </a:bodyPr>
+          <a:lstStyle/>
+          <a:p>
+            <a:r>
+              <a:rPr sz="800" b="1">
+                <a:solidFill>
+                  <a:srgbClr val="00366A"/>
+                </a:solidFill>
+                <a:latin typeface="Microsoft YaHei"/>
+              </a:rPr>
+              <a:t>2028  </a:t>
+            </a:r>
+            <a:r>
+              <a:rPr sz="750" b="0">
+                <a:solidFill>
+                  <a:srgbClr val="0F2B46"/>
+                </a:solidFill>
+                <a:latin typeface="Microsoft YaHei"/>
+              </a:rPr>
+              <a:t>详设 +
+长周期设备采购</a:t>
+            </a:r>
+          </a:p>
+        </p:txBody>
+      </p:sp>
+      <p:sp>
+        <p:nvSpPr>
+          <p:cNvPr id="13" name="Rounded Rectangle 12"/>
+          <p:cNvSpPr/>
+          <p:nvPr/>
+        </p:nvSpPr>
+        <p:spPr>
+          <a:xfrm>
+            <a:off x="6858000" y="4617720"/>
+            <a:ext cx="2057400" cy="502920"/>
+          </a:xfrm>
+          <a:prstGeom prst="roundRect">
+            <a:avLst/>
+          </a:prstGeom>
+          <a:solidFill>
+            <a:srgbClr val="E7EEFB"/>
+          </a:solidFill>
+          <a:ln>
+            <a:solidFill>
+              <a:srgbClr val="1A4A6E"/>
+            </a:solidFill>
+          </a:ln>
+        </p:spPr>
+        <p:style>
+          <a:lnRef idx="1">
+            <a:schemeClr val="accent1"/>
+          </a:lnRef>
+          <a:fillRef idx="3">
+            <a:schemeClr val="accent1"/>
+          </a:fillRef>
+          <a:effectRef idx="2">
+            <a:schemeClr val="accent1"/>
+          </a:effectRef>
+          <a:fontRef idx="minor">
+            <a:schemeClr val="lt1"/>
+          </a:fontRef>
+        </p:style>
+        <p:txBody>
+          <a:bodyPr rtlCol="0" anchor="ctr"/>
+          <a:lstStyle/>
+          <a:p>
+            <a:pPr algn="ctr"/>
+          </a:p>
+        </p:txBody>
+      </p:sp>
+      <p:sp>
+        <p:nvSpPr>
+          <p:cNvPr id="14" name="TextBox 13"/>
+          <p:cNvSpPr txBox="1"/>
+          <p:nvPr/>
+        </p:nvSpPr>
+        <p:spPr>
+          <a:xfrm>
+            <a:off x="6949440" y="4645152"/>
+            <a:ext cx="1874519" cy="457200"/>
+          </a:xfrm>
+          <a:prstGeom prst="rect">
+            <a:avLst/>
+          </a:prstGeom>
+          <a:noFill/>
+        </p:spPr>
+        <p:txBody>
+          <a:bodyPr wrap="none">
+            <a:spAutoFit/>
+          </a:bodyPr>
+          <a:lstStyle/>
+          <a:p>
+            <a:r>
+              <a:rPr sz="800" b="1">
+                <a:solidFill>
+                  <a:srgbClr val="00366A"/>
+                </a:solidFill>
+                <a:latin typeface="Microsoft YaHei"/>
+              </a:rPr>
+              <a:t>2028–30  </a:t>
+            </a:r>
+            <a:r>
+              <a:rPr sz="750" b="0">
+                <a:solidFill>
+                  <a:srgbClr val="0F2B46"/>
+                </a:solidFill>
+                <a:latin typeface="Microsoft YaHei"/>
+              </a:rPr>
+              <a:t>施工 · 调试 · 竣工</a:t>
+            </a:r>
+          </a:p>
+        </p:txBody>
+      </p:sp>
+      <p:sp>
+        <p:nvSpPr>
+          <p:cNvPr id="15" name="TextBox 14"/>
+          <p:cNvSpPr txBox="1"/>
+          <p:nvPr/>
+        </p:nvSpPr>
+        <p:spPr>
+          <a:xfrm>
+            <a:off x="274320" y="4892040"/>
+            <a:ext cx="2103120" cy="182880"/>
+          </a:xfrm>
+          <a:prstGeom prst="rect">
+            <a:avLst/>
+          </a:prstGeom>
+          <a:noFill/>
+        </p:spPr>
+        <p:txBody>
+          <a:bodyPr wrap="none">
+            <a:spAutoFit/>
+          </a:bodyPr>
+          <a:lstStyle/>
+          <a:p>
+            <a:pPr algn="l">
+              <a:spcAft>
+                <a:spcPts val="400"/>
+              </a:spcAft>
+              <a:defRPr sz="700" b="0">
+                <a:solidFill>
+                  <a:srgbClr val="2C3E50"/>
+                </a:solidFill>
+                <a:latin typeface="Microsoft YaHei"/>
+              </a:defRPr>
+            </a:pPr>
+            <a:r>
+              <a:t>www.asymchem.com.cn</a:t>
+            </a:r>
+          </a:p>
+        </p:txBody>
+      </p:sp>
+      <p:sp>
+        <p:nvSpPr>
+          <p:cNvPr id="16" name="TextBox 15"/>
+          <p:cNvSpPr txBox="1"/>
+          <p:nvPr/>
+        </p:nvSpPr>
+        <p:spPr>
+          <a:xfrm>
+            <a:off x="2377440" y="4892040"/>
+            <a:ext cx="2286000" cy="182880"/>
+          </a:xfrm>
+          <a:prstGeom prst="rect">
+            <a:avLst/>
+          </a:prstGeom>
+          <a:noFill/>
+        </p:spPr>
+        <p:txBody>
+          <a:bodyPr wrap="none">
+            <a:spAutoFit/>
+          </a:bodyPr>
+          <a:lstStyle/>
+          <a:p>
+            <a:pPr algn="l">
+              <a:spcAft>
+                <a:spcPts val="400"/>
+              </a:spcAft>
+              <a:defRPr sz="700" b="0">
+                <a:solidFill>
+                  <a:srgbClr val="2C3E50"/>
+                </a:solidFill>
+                <a:latin typeface="Microsoft YaHei"/>
+              </a:defRPr>
+            </a:pPr>
+            <a:r>
+              <a:t>Stock Code: 002821.SZ / 6821.HK</a:t>
+            </a:r>
+          </a:p>
+        </p:txBody>
+      </p:sp>
+      <p:sp>
+        <p:nvSpPr>
+          <p:cNvPr id="17" name="TextBox 16"/>
+          <p:cNvSpPr txBox="1"/>
+          <p:nvPr/>
+        </p:nvSpPr>
+        <p:spPr>
+          <a:xfrm>
+            <a:off x="8595360" y="4892040"/>
+            <a:ext cx="457200" cy="182880"/>
+          </a:xfrm>
+          <a:prstGeom prst="rect">
+            <a:avLst/>
+          </a:prstGeom>
+          <a:noFill/>
+        </p:spPr>
+        <p:txBody>
+          <a:bodyPr wrap="none">
+            <a:spAutoFit/>
+          </a:bodyPr>
+          <a:lstStyle/>
+          <a:p>
+            <a:pPr algn="r">
+              <a:spcAft>
+                <a:spcPts val="400"/>
+              </a:spcAft>
+              <a:defRPr sz="700" b="0">
+                <a:solidFill>
+                  <a:srgbClr val="2C3E50"/>
+                </a:solidFill>
+                <a:latin typeface="Microsoft YaHei"/>
+              </a:defRPr>
+            </a:pPr>
+            <a:r>
+              <a:t>11</a:t>
+            </a:r>
           </a:p>
         </p:txBody>
       </p:sp>
@@ -7717,14 +13592,6 @@
           <a:p>
             <a:pPr algn="r"/>
             <a:r>
-              <a:rPr sz="800" b="0">
-                <a:solidFill>
-                  <a:srgbClr val="FFFFFF"/>
-                </a:solidFill>
-                <a:latin typeface="Arial" panose="020B0604020202020204"/>
-                <a:ea typeface="微软雅黑" panose="020B0503020204020204" charset="-122"/>
-                <a:cs typeface="微软雅黑" panose="020B0503020204020204" charset="-122"/>
-              </a:rPr>
               <a:t>2</a:t>
             </a:r>
             <a:endParaRPr sz="800" b="0">
@@ -9433,12 +15300,6 @@
               </a:lnSpc>
             </a:pPr>
             <a:r>
-              <a:rPr sz="800" b="0">
-                <a:solidFill>
-                  <a:srgbClr val="7A89A8"/>
-                </a:solidFill>
-                <a:latin typeface="Arial" panose="020B0604020202020204"/>
-              </a:rPr>
               <a:t>3</a:t>
             </a:r>
             <a:endParaRPr sz="800" b="0">
@@ -11078,12 +16939,6 @@
               </a:lnSpc>
             </a:pPr>
             <a:r>
-              <a:rPr sz="800" b="0">
-                <a:solidFill>
-                  <a:srgbClr val="7A89A8"/>
-                </a:solidFill>
-                <a:latin typeface="Arial" panose="020B0604020202020204"/>
-              </a:rPr>
               <a:t>4</a:t>
             </a:r>
             <a:endParaRPr sz="800" b="0">
@@ -12896,12 +18751,6 @@
               </a:lnSpc>
             </a:pPr>
             <a:r>
-              <a:rPr sz="800" b="0">
-                <a:solidFill>
-                  <a:srgbClr val="7A89A8"/>
-                </a:solidFill>
-                <a:latin typeface="Arial" panose="020B0604020202020204"/>
-              </a:rPr>
               <a:t>5</a:t>
             </a:r>
             <a:endParaRPr sz="800" b="0">
@@ -14139,12 +19988,6 @@
               </a:lnSpc>
             </a:pPr>
             <a:r>
-              <a:rPr sz="800" b="0">
-                <a:solidFill>
-                  <a:srgbClr val="7A89A8"/>
-                </a:solidFill>
-                <a:latin typeface="Arial" panose="020B0604020202020204"/>
-              </a:rPr>
               <a:t>6</a:t>
             </a:r>
             <a:endParaRPr sz="800" b="0">
@@ -14422,15 +20265,7 @@
           <a:p>
             <a:pPr algn="r"/>
             <a:r>
-              <a:rPr sz="800" b="0">
-                <a:solidFill>
-                  <a:srgbClr val="FFFFFF"/>
-                </a:solidFill>
-                <a:latin typeface="Arial" panose="020B0604020202020204"/>
-                <a:ea typeface="微软雅黑" panose="020B0503020204020204" charset="-122"/>
-                <a:cs typeface="微软雅黑" panose="020B0503020204020204" charset="-122"/>
-              </a:rPr>
-              <a:t>7</a:t>
+              <a:t>12</a:t>
             </a:r>
             <a:endParaRPr sz="800" b="0">
               <a:solidFill>
@@ -14663,15 +20498,7 @@
           <a:p>
             <a:pPr algn="r"/>
             <a:r>
-              <a:rPr sz="800" b="0">
-                <a:solidFill>
-                  <a:srgbClr val="7A89A8"/>
-                </a:solidFill>
-                <a:latin typeface="Arial" panose="020B0604020202020204"/>
-                <a:ea typeface="微软雅黑" panose="020B0503020204020204" charset="-122"/>
-                <a:cs typeface="微软雅黑" panose="020B0503020204020204" charset="-122"/>
-              </a:rPr>
-              <a:t>8</a:t>
+              <a:t>13</a:t>
             </a:r>
             <a:endParaRPr sz="800" b="0">
               <a:solidFill>
@@ -16219,15 +22046,7 @@
           <a:p>
             <a:pPr algn="r"/>
             <a:r>
-              <a:rPr sz="800" b="0">
-                <a:solidFill>
-                  <a:srgbClr val="7A89A8"/>
-                </a:solidFill>
-                <a:latin typeface="Arial" panose="020B0604020202020204"/>
-                <a:ea typeface="微软雅黑" panose="020B0503020204020204" charset="-122"/>
-                <a:cs typeface="微软雅黑" panose="020B0503020204020204" charset="-122"/>
-              </a:rPr>
-              <a:t>10</a:t>
+              <a:t>14</a:t>
             </a:r>
             <a:endParaRPr sz="800" b="0">
               <a:solidFill>
